--- a/CoinGecko_DogePay_Presentation.pptx
+++ b/CoinGecko_DogePay_Presentation.pptx
@@ -3089,18 +3089,6 @@
 
 <file path=ppt/slides/slide1.xml><?xml version="1.0" encoding="utf-8"?>
 <p:sld xmlns:a="http://schemas.openxmlformats.org/drawingml/2006/main" xmlns:p="http://schemas.openxmlformats.org/presentationml/2006/main" xmlns:r="http://schemas.openxmlformats.org/officeDocument/2006/relationships">
-  <mc:AlternateContent xmlns:mc="http://schemas.openxmlformats.org/markup-compatibility/2006" xmlns:p14="http://schemas.microsoft.com/office/powerpoint/2010/main">
-    <mc:Choice Requires="p14">
-      <p:transition spd="med" advClick="1">
-        <p14:prism dir="l"/>
-      </p:transition>
-    </mc:Choice>
-    <mc:Fallback>
-      <p:transition spd="med" advClick="1">
-        <p:fade/>
-      </p:transition>
-    </mc:Fallback>
-  </mc:AlternateContent>
   <p:cSld>
     <p:spTree>
       <p:nvGrpSpPr>
@@ -3135,6 +3123,9 @@
       </p:pic>
     </p:spTree>
   </p:cSld>
+  <p:transition spd="med" advClick="1">
+    <p:fade/>
+  </p:transition>
   <p:clrMapOvr>
     <a:masterClrMapping/>
   </p:clrMapOvr>
@@ -3143,18 +3134,6 @@
 
 <file path=ppt/slides/slide10.xml><?xml version="1.0" encoding="utf-8"?>
 <p:sld xmlns:a="http://schemas.openxmlformats.org/drawingml/2006/main" xmlns:p="http://schemas.openxmlformats.org/presentationml/2006/main" xmlns:r="http://schemas.openxmlformats.org/officeDocument/2006/relationships">
-  <mc:AlternateContent xmlns:mc="http://schemas.openxmlformats.org/markup-compatibility/2006" xmlns:p14="http://schemas.microsoft.com/office/powerpoint/2010/main">
-    <mc:Choice Requires="p14">
-      <p:transition spd="med" advClick="1">
-        <p14:prism dir="l"/>
-      </p:transition>
-    </mc:Choice>
-    <mc:Fallback>
-      <p:transition spd="med" advClick="1">
-        <p:fade/>
-      </p:transition>
-    </mc:Fallback>
-  </mc:AlternateContent>
   <p:cSld>
     <p:spTree>
       <p:nvGrpSpPr>
@@ -3189,6 +3168,9 @@
       </p:pic>
     </p:spTree>
   </p:cSld>
+  <p:transition spd="med" advClick="1">
+    <p:fade/>
+  </p:transition>
   <p:clrMapOvr>
     <a:masterClrMapping/>
   </p:clrMapOvr>
@@ -3197,18 +3179,6 @@
 
 <file path=ppt/slides/slide2.xml><?xml version="1.0" encoding="utf-8"?>
 <p:sld xmlns:a="http://schemas.openxmlformats.org/drawingml/2006/main" xmlns:p="http://schemas.openxmlformats.org/presentationml/2006/main" xmlns:r="http://schemas.openxmlformats.org/officeDocument/2006/relationships">
-  <mc:AlternateContent xmlns:mc="http://schemas.openxmlformats.org/markup-compatibility/2006" xmlns:p14="http://schemas.microsoft.com/office/powerpoint/2010/main">
-    <mc:Choice Requires="p14">
-      <p:transition spd="med" advClick="1">
-        <p14:prism dir="l"/>
-      </p:transition>
-    </mc:Choice>
-    <mc:Fallback>
-      <p:transition spd="med" advClick="1">
-        <p:fade/>
-      </p:transition>
-    </mc:Fallback>
-  </mc:AlternateContent>
   <p:cSld>
     <p:spTree>
       <p:nvGrpSpPr>
@@ -3243,6 +3213,9 @@
       </p:pic>
     </p:spTree>
   </p:cSld>
+  <p:transition spd="med" advClick="1">
+    <p:fade/>
+  </p:transition>
   <p:clrMapOvr>
     <a:masterClrMapping/>
   </p:clrMapOvr>
@@ -3251,18 +3224,6 @@
 
 <file path=ppt/slides/slide3.xml><?xml version="1.0" encoding="utf-8"?>
 <p:sld xmlns:a="http://schemas.openxmlformats.org/drawingml/2006/main" xmlns:p="http://schemas.openxmlformats.org/presentationml/2006/main" xmlns:r="http://schemas.openxmlformats.org/officeDocument/2006/relationships">
-  <mc:AlternateContent xmlns:mc="http://schemas.openxmlformats.org/markup-compatibility/2006" xmlns:p14="http://schemas.microsoft.com/office/powerpoint/2010/main">
-    <mc:Choice Requires="p14">
-      <p:transition spd="med" advClick="1">
-        <p14:prism dir="l"/>
-      </p:transition>
-    </mc:Choice>
-    <mc:Fallback>
-      <p:transition spd="med" advClick="1">
-        <p:fade/>
-      </p:transition>
-    </mc:Fallback>
-  </mc:AlternateContent>
   <p:cSld>
     <p:spTree>
       <p:nvGrpSpPr>
@@ -3297,6 +3258,9 @@
       </p:pic>
     </p:spTree>
   </p:cSld>
+  <p:transition spd="med" advClick="1">
+    <p:fade/>
+  </p:transition>
   <p:clrMapOvr>
     <a:masterClrMapping/>
   </p:clrMapOvr>
@@ -3305,18 +3269,6 @@
 
 <file path=ppt/slides/slide4.xml><?xml version="1.0" encoding="utf-8"?>
 <p:sld xmlns:a="http://schemas.openxmlformats.org/drawingml/2006/main" xmlns:p="http://schemas.openxmlformats.org/presentationml/2006/main" xmlns:r="http://schemas.openxmlformats.org/officeDocument/2006/relationships">
-  <mc:AlternateContent xmlns:mc="http://schemas.openxmlformats.org/markup-compatibility/2006" xmlns:p14="http://schemas.microsoft.com/office/powerpoint/2010/main">
-    <mc:Choice Requires="p14">
-      <p:transition spd="med" advClick="1">
-        <p14:prism dir="l"/>
-      </p:transition>
-    </mc:Choice>
-    <mc:Fallback>
-      <p:transition spd="med" advClick="1">
-        <p:fade/>
-      </p:transition>
-    </mc:Fallback>
-  </mc:AlternateContent>
   <p:cSld>
     <p:spTree>
       <p:nvGrpSpPr>
@@ -3351,6 +3303,9 @@
       </p:pic>
     </p:spTree>
   </p:cSld>
+  <p:transition spd="med" advClick="1">
+    <p:fade/>
+  </p:transition>
   <p:clrMapOvr>
     <a:masterClrMapping/>
   </p:clrMapOvr>
@@ -3359,18 +3314,6 @@
 
 <file path=ppt/slides/slide5.xml><?xml version="1.0" encoding="utf-8"?>
 <p:sld xmlns:a="http://schemas.openxmlformats.org/drawingml/2006/main" xmlns:p="http://schemas.openxmlformats.org/presentationml/2006/main" xmlns:r="http://schemas.openxmlformats.org/officeDocument/2006/relationships">
-  <mc:AlternateContent xmlns:mc="http://schemas.openxmlformats.org/markup-compatibility/2006" xmlns:p14="http://schemas.microsoft.com/office/powerpoint/2010/main">
-    <mc:Choice Requires="p14">
-      <p:transition spd="med" advClick="1">
-        <p14:prism dir="l"/>
-      </p:transition>
-    </mc:Choice>
-    <mc:Fallback>
-      <p:transition spd="med" advClick="1">
-        <p:fade/>
-      </p:transition>
-    </mc:Fallback>
-  </mc:AlternateContent>
   <p:cSld>
     <p:spTree>
       <p:nvGrpSpPr>
@@ -3405,6 +3348,9 @@
       </p:pic>
     </p:spTree>
   </p:cSld>
+  <p:transition spd="med" advClick="1">
+    <p:fade/>
+  </p:transition>
   <p:clrMapOvr>
     <a:masterClrMapping/>
   </p:clrMapOvr>
@@ -3413,18 +3359,6 @@
 
 <file path=ppt/slides/slide6.xml><?xml version="1.0" encoding="utf-8"?>
 <p:sld xmlns:a="http://schemas.openxmlformats.org/drawingml/2006/main" xmlns:p="http://schemas.openxmlformats.org/presentationml/2006/main" xmlns:r="http://schemas.openxmlformats.org/officeDocument/2006/relationships">
-  <mc:AlternateContent xmlns:mc="http://schemas.openxmlformats.org/markup-compatibility/2006" xmlns:p14="http://schemas.microsoft.com/office/powerpoint/2010/main">
-    <mc:Choice Requires="p14">
-      <p:transition spd="med" advClick="1">
-        <p14:prism dir="l"/>
-      </p:transition>
-    </mc:Choice>
-    <mc:Fallback>
-      <p:transition spd="med" advClick="1">
-        <p:fade/>
-      </p:transition>
-    </mc:Fallback>
-  </mc:AlternateContent>
   <p:cSld>
     <p:spTree>
       <p:nvGrpSpPr>
@@ -3459,6 +3393,9 @@
       </p:pic>
     </p:spTree>
   </p:cSld>
+  <p:transition spd="med" advClick="1">
+    <p:fade/>
+  </p:transition>
   <p:clrMapOvr>
     <a:masterClrMapping/>
   </p:clrMapOvr>
@@ -3467,18 +3404,6 @@
 
 <file path=ppt/slides/slide7.xml><?xml version="1.0" encoding="utf-8"?>
 <p:sld xmlns:a="http://schemas.openxmlformats.org/drawingml/2006/main" xmlns:p="http://schemas.openxmlformats.org/presentationml/2006/main" xmlns:r="http://schemas.openxmlformats.org/officeDocument/2006/relationships">
-  <mc:AlternateContent xmlns:mc="http://schemas.openxmlformats.org/markup-compatibility/2006" xmlns:p14="http://schemas.microsoft.com/office/powerpoint/2010/main">
-    <mc:Choice Requires="p14">
-      <p:transition spd="med" advClick="1">
-        <p14:prism dir="l"/>
-      </p:transition>
-    </mc:Choice>
-    <mc:Fallback>
-      <p:transition spd="med" advClick="1">
-        <p:fade/>
-      </p:transition>
-    </mc:Fallback>
-  </mc:AlternateContent>
   <p:cSld>
     <p:spTree>
       <p:nvGrpSpPr>
@@ -3513,6 +3438,9 @@
       </p:pic>
     </p:spTree>
   </p:cSld>
+  <p:transition spd="med" advClick="1">
+    <p:fade/>
+  </p:transition>
   <p:clrMapOvr>
     <a:masterClrMapping/>
   </p:clrMapOvr>
@@ -3521,18 +3449,6 @@
 
 <file path=ppt/slides/slide8.xml><?xml version="1.0" encoding="utf-8"?>
 <p:sld xmlns:a="http://schemas.openxmlformats.org/drawingml/2006/main" xmlns:p="http://schemas.openxmlformats.org/presentationml/2006/main" xmlns:r="http://schemas.openxmlformats.org/officeDocument/2006/relationships">
-  <mc:AlternateContent xmlns:mc="http://schemas.openxmlformats.org/markup-compatibility/2006" xmlns:p14="http://schemas.microsoft.com/office/powerpoint/2010/main">
-    <mc:Choice Requires="p14">
-      <p:transition spd="med" advClick="1">
-        <p14:prism dir="l"/>
-      </p:transition>
-    </mc:Choice>
-    <mc:Fallback>
-      <p:transition spd="med" advClick="1">
-        <p:fade/>
-      </p:transition>
-    </mc:Fallback>
-  </mc:AlternateContent>
   <p:cSld>
     <p:spTree>
       <p:nvGrpSpPr>
@@ -3567,6 +3483,9 @@
       </p:pic>
     </p:spTree>
   </p:cSld>
+  <p:transition spd="med" advClick="1">
+    <p:fade/>
+  </p:transition>
   <p:clrMapOvr>
     <a:masterClrMapping/>
   </p:clrMapOvr>
@@ -3575,18 +3494,6 @@
 
 <file path=ppt/slides/slide9.xml><?xml version="1.0" encoding="utf-8"?>
 <p:sld xmlns:a="http://schemas.openxmlformats.org/drawingml/2006/main" xmlns:p="http://schemas.openxmlformats.org/presentationml/2006/main" xmlns:r="http://schemas.openxmlformats.org/officeDocument/2006/relationships">
-  <mc:AlternateContent xmlns:mc="http://schemas.openxmlformats.org/markup-compatibility/2006" xmlns:p14="http://schemas.microsoft.com/office/powerpoint/2010/main">
-    <mc:Choice Requires="p14">
-      <p:transition spd="med" advClick="1">
-        <p14:prism dir="l"/>
-      </p:transition>
-    </mc:Choice>
-    <mc:Fallback>
-      <p:transition spd="med" advClick="1">
-        <p:fade/>
-      </p:transition>
-    </mc:Fallback>
-  </mc:AlternateContent>
   <p:cSld>
     <p:spTree>
       <p:nvGrpSpPr>
@@ -3621,6 +3528,9 @@
       </p:pic>
     </p:spTree>
   </p:cSld>
+  <p:transition spd="med" advClick="1">
+    <p:fade/>
+  </p:transition>
   <p:clrMapOvr>
     <a:masterClrMapping/>
   </p:clrMapOvr>

--- a/CoinGecko_DogePay_Presentation.pptx
+++ b/CoinGecko_DogePay_Presentation.pptx
@@ -4,19 +4,22 @@
   <p:sldMasterIdLst>
     <p:sldMasterId id="2147483648" r:id="rId1"/>
   </p:sldMasterIdLst>
+  <p:notesMasterIdLst>
+    <p:notesMasterId r:id="rId12"/>
+  </p:notesMasterIdLst>
   <p:sldIdLst>
-    <p:sldId id="256" r:id="rId7"/>
-    <p:sldId id="257" r:id="rId8"/>
-    <p:sldId id="258" r:id="rId9"/>
-    <p:sldId id="259" r:id="rId10"/>
-    <p:sldId id="260" r:id="rId11"/>
-    <p:sldId id="261" r:id="rId12"/>
-    <p:sldId id="262" r:id="rId13"/>
-    <p:sldId id="263" r:id="rId14"/>
-    <p:sldId id="264" r:id="rId15"/>
-    <p:sldId id="265" r:id="rId16"/>
+    <p:sldId id="256" r:id="rId2"/>
+    <p:sldId id="257" r:id="rId3"/>
+    <p:sldId id="258" r:id="rId4"/>
+    <p:sldId id="259" r:id="rId5"/>
+    <p:sldId id="260" r:id="rId6"/>
+    <p:sldId id="261" r:id="rId7"/>
+    <p:sldId id="262" r:id="rId8"/>
+    <p:sldId id="263" r:id="rId9"/>
+    <p:sldId id="264" r:id="rId10"/>
+    <p:sldId id="265" r:id="rId11"/>
   </p:sldIdLst>
-  <p:sldSz cx="12192000" cy="6858000" type="screen4x3"/>
+  <p:sldSz cx="12192000" cy="6858000"/>
   <p:notesSz cx="6858000" cy="9144000"/>
   <p:defaultTextStyle>
     <a:defPPr>
@@ -113,7 +116,2240 @@
       </a:defRPr>
     </a:lvl9pPr>
   </p:defaultTextStyle>
+  <p:extLst>
+    <p:ext uri="{EFAFB233-063F-42B5-8137-9DF3F51BA10A}">
+      <p15:sldGuideLst xmlns:p15="http://schemas.microsoft.com/office/powerpoint/2012/main">
+        <p15:guide id="1" orient="horz" pos="2160">
+          <p15:clr>
+            <a:srgbClr val="A4A3A4"/>
+          </p15:clr>
+        </p15:guide>
+        <p15:guide id="2" pos="2880">
+          <p15:clr>
+            <a:srgbClr val="A4A3A4"/>
+          </p15:clr>
+        </p15:guide>
+      </p15:sldGuideLst>
+    </p:ext>
+  </p:extLst>
 </p:presentation>
+</file>
+
+<file path=ppt/notesMasters/notesMaster1.xml><?xml version="1.0" encoding="utf-8"?>
+<p:notesMaster xmlns:a="http://schemas.openxmlformats.org/drawingml/2006/main" xmlns:r="http://schemas.openxmlformats.org/officeDocument/2006/relationships" xmlns:p="http://schemas.openxmlformats.org/presentationml/2006/main">
+  <p:cSld>
+    <p:bg>
+      <p:bgRef idx="1001">
+        <a:schemeClr val="bg1"/>
+      </p:bgRef>
+    </p:bg>
+    <p:spTree>
+      <p:nvGrpSpPr>
+        <p:cNvPr id="1" name=""/>
+        <p:cNvGrpSpPr/>
+        <p:nvPr/>
+      </p:nvGrpSpPr>
+      <p:grpSpPr>
+        <a:xfrm>
+          <a:off x="0" y="0"/>
+          <a:ext cx="0" cy="0"/>
+          <a:chOff x="0" y="0"/>
+          <a:chExt cx="0" cy="0"/>
+        </a:xfrm>
+      </p:grpSpPr>
+      <p:sp>
+        <p:nvSpPr>
+          <p:cNvPr id="2" name="Header Placeholder 1"/>
+          <p:cNvSpPr>
+            <a:spLocks noGrp="1"/>
+          </p:cNvSpPr>
+          <p:nvPr>
+            <p:ph type="hdr" sz="quarter"/>
+          </p:nvPr>
+        </p:nvSpPr>
+        <p:spPr>
+          <a:xfrm>
+            <a:off x="0" y="0"/>
+            <a:ext cx="2971800" cy="458788"/>
+          </a:xfrm>
+          <a:prstGeom prst="rect">
+            <a:avLst/>
+          </a:prstGeom>
+        </p:spPr>
+        <p:txBody>
+          <a:bodyPr vert="horz" lIns="91440" tIns="45720" rIns="91440" bIns="45720" rtlCol="0"/>
+          <a:lstStyle>
+            <a:lvl1pPr algn="l">
+              <a:defRPr sz="1200"/>
+            </a:lvl1pPr>
+          </a:lstStyle>
+          <a:p>
+            <a:endParaRPr lang="en-US"/>
+          </a:p>
+        </p:txBody>
+      </p:sp>
+      <p:sp>
+        <p:nvSpPr>
+          <p:cNvPr id="3" name="Date Placeholder 2"/>
+          <p:cNvSpPr>
+            <a:spLocks noGrp="1"/>
+          </p:cNvSpPr>
+          <p:nvPr>
+            <p:ph type="dt" idx="1"/>
+          </p:nvPr>
+        </p:nvSpPr>
+        <p:spPr>
+          <a:xfrm>
+            <a:off x="3884613" y="0"/>
+            <a:ext cx="2971800" cy="458788"/>
+          </a:xfrm>
+          <a:prstGeom prst="rect">
+            <a:avLst/>
+          </a:prstGeom>
+        </p:spPr>
+        <p:txBody>
+          <a:bodyPr vert="horz" lIns="91440" tIns="45720" rIns="91440" bIns="45720" rtlCol="0"/>
+          <a:lstStyle>
+            <a:lvl1pPr algn="r">
+              <a:defRPr sz="1200"/>
+            </a:lvl1pPr>
+          </a:lstStyle>
+          <a:p>
+            <a:fld id="{9D775BA8-B4F0-40C6-8200-6288A18FC24D}" type="datetimeFigureOut">
+              <a:rPr lang="en-US" smtClean="0"/>
+              <a:t>3/17/2026</a:t>
+            </a:fld>
+            <a:endParaRPr lang="en-US"/>
+          </a:p>
+        </p:txBody>
+      </p:sp>
+      <p:sp>
+        <p:nvSpPr>
+          <p:cNvPr id="4" name="Slide Image Placeholder 3"/>
+          <p:cNvSpPr>
+            <a:spLocks noGrp="1" noRot="1" noChangeAspect="1"/>
+          </p:cNvSpPr>
+          <p:nvPr>
+            <p:ph type="sldImg" idx="2"/>
+          </p:nvPr>
+        </p:nvSpPr>
+        <p:spPr>
+          <a:xfrm>
+            <a:off x="685800" y="1143000"/>
+            <a:ext cx="5486400" cy="3086100"/>
+          </a:xfrm>
+          <a:prstGeom prst="rect">
+            <a:avLst/>
+          </a:prstGeom>
+          <a:noFill/>
+          <a:ln w="12700">
+            <a:solidFill>
+              <a:prstClr val="black"/>
+            </a:solidFill>
+          </a:ln>
+        </p:spPr>
+        <p:txBody>
+          <a:bodyPr vert="horz" lIns="91440" tIns="45720" rIns="91440" bIns="45720" rtlCol="0" anchor="ctr"/>
+          <a:lstStyle/>
+          <a:p>
+            <a:endParaRPr lang="en-US"/>
+          </a:p>
+        </p:txBody>
+      </p:sp>
+      <p:sp>
+        <p:nvSpPr>
+          <p:cNvPr id="5" name="Notes Placeholder 4"/>
+          <p:cNvSpPr>
+            <a:spLocks noGrp="1"/>
+          </p:cNvSpPr>
+          <p:nvPr>
+            <p:ph type="body" sz="quarter" idx="3"/>
+          </p:nvPr>
+        </p:nvSpPr>
+        <p:spPr>
+          <a:xfrm>
+            <a:off x="685800" y="4400550"/>
+            <a:ext cx="5486400" cy="3600450"/>
+          </a:xfrm>
+          <a:prstGeom prst="rect">
+            <a:avLst/>
+          </a:prstGeom>
+        </p:spPr>
+        <p:txBody>
+          <a:bodyPr vert="horz" lIns="91440" tIns="45720" rIns="91440" bIns="45720" rtlCol="0"/>
+          <a:lstStyle/>
+          <a:p>
+            <a:pPr lvl="0"/>
+            <a:r>
+              <a:rPr lang="en-US"/>
+              <a:t>Click to edit Master text styles</a:t>
+            </a:r>
+          </a:p>
+          <a:p>
+            <a:pPr lvl="1"/>
+            <a:r>
+              <a:rPr lang="en-US"/>
+              <a:t>Second level</a:t>
+            </a:r>
+          </a:p>
+          <a:p>
+            <a:pPr lvl="2"/>
+            <a:r>
+              <a:rPr lang="en-US"/>
+              <a:t>Third level</a:t>
+            </a:r>
+          </a:p>
+          <a:p>
+            <a:pPr lvl="3"/>
+            <a:r>
+              <a:rPr lang="en-US"/>
+              <a:t>Fourth level</a:t>
+            </a:r>
+          </a:p>
+          <a:p>
+            <a:pPr lvl="4"/>
+            <a:r>
+              <a:rPr lang="en-US"/>
+              <a:t>Fifth level</a:t>
+            </a:r>
+          </a:p>
+        </p:txBody>
+      </p:sp>
+      <p:sp>
+        <p:nvSpPr>
+          <p:cNvPr id="6" name="Footer Placeholder 5"/>
+          <p:cNvSpPr>
+            <a:spLocks noGrp="1"/>
+          </p:cNvSpPr>
+          <p:nvPr>
+            <p:ph type="ftr" sz="quarter" idx="4"/>
+          </p:nvPr>
+        </p:nvSpPr>
+        <p:spPr>
+          <a:xfrm>
+            <a:off x="0" y="8685213"/>
+            <a:ext cx="2971800" cy="458787"/>
+          </a:xfrm>
+          <a:prstGeom prst="rect">
+            <a:avLst/>
+          </a:prstGeom>
+        </p:spPr>
+        <p:txBody>
+          <a:bodyPr vert="horz" lIns="91440" tIns="45720" rIns="91440" bIns="45720" rtlCol="0" anchor="b"/>
+          <a:lstStyle>
+            <a:lvl1pPr algn="l">
+              <a:defRPr sz="1200"/>
+            </a:lvl1pPr>
+          </a:lstStyle>
+          <a:p>
+            <a:endParaRPr lang="en-US"/>
+          </a:p>
+        </p:txBody>
+      </p:sp>
+      <p:sp>
+        <p:nvSpPr>
+          <p:cNvPr id="7" name="Slide Number Placeholder 6"/>
+          <p:cNvSpPr>
+            <a:spLocks noGrp="1"/>
+          </p:cNvSpPr>
+          <p:nvPr>
+            <p:ph type="sldNum" sz="quarter" idx="5"/>
+          </p:nvPr>
+        </p:nvSpPr>
+        <p:spPr>
+          <a:xfrm>
+            <a:off x="3884613" y="8685213"/>
+            <a:ext cx="2971800" cy="458787"/>
+          </a:xfrm>
+          <a:prstGeom prst="rect">
+            <a:avLst/>
+          </a:prstGeom>
+        </p:spPr>
+        <p:txBody>
+          <a:bodyPr vert="horz" lIns="91440" tIns="45720" rIns="91440" bIns="45720" rtlCol="0" anchor="b"/>
+          <a:lstStyle>
+            <a:lvl1pPr algn="r">
+              <a:defRPr sz="1200"/>
+            </a:lvl1pPr>
+          </a:lstStyle>
+          <a:p>
+            <a:fld id="{BC96FA82-26EF-4C1E-9441-91F88F3006C0}" type="slidenum">
+              <a:rPr lang="en-US" smtClean="0"/>
+              <a:t>‹#›</a:t>
+            </a:fld>
+            <a:endParaRPr lang="en-US"/>
+          </a:p>
+        </p:txBody>
+      </p:sp>
+    </p:spTree>
+    <p:extLst>
+      <p:ext uri="{BB962C8B-B14F-4D97-AF65-F5344CB8AC3E}">
+        <p14:creationId xmlns:p14="http://schemas.microsoft.com/office/powerpoint/2010/main" val="472160983"/>
+      </p:ext>
+    </p:extLst>
+  </p:cSld>
+  <p:clrMap bg1="lt1" tx1="dk1" bg2="lt2" tx2="dk2" accent1="accent1" accent2="accent2" accent3="accent3" accent4="accent4" accent5="accent5" accent6="accent6" hlink="hlink" folHlink="folHlink"/>
+  <p:notesStyle>
+    <a:lvl1pPr marL="0" algn="l" defTabSz="914400" rtl="0" eaLnBrk="1" latinLnBrk="0" hangingPunct="1">
+      <a:defRPr sz="1200" kern="1200">
+        <a:solidFill>
+          <a:schemeClr val="tx1"/>
+        </a:solidFill>
+        <a:latin typeface="+mn-lt"/>
+        <a:ea typeface="+mn-ea"/>
+        <a:cs typeface="+mn-cs"/>
+      </a:defRPr>
+    </a:lvl1pPr>
+    <a:lvl2pPr marL="457200" algn="l" defTabSz="914400" rtl="0" eaLnBrk="1" latinLnBrk="0" hangingPunct="1">
+      <a:defRPr sz="1200" kern="1200">
+        <a:solidFill>
+          <a:schemeClr val="tx1"/>
+        </a:solidFill>
+        <a:latin typeface="+mn-lt"/>
+        <a:ea typeface="+mn-ea"/>
+        <a:cs typeface="+mn-cs"/>
+      </a:defRPr>
+    </a:lvl2pPr>
+    <a:lvl3pPr marL="914400" algn="l" defTabSz="914400" rtl="0" eaLnBrk="1" latinLnBrk="0" hangingPunct="1">
+      <a:defRPr sz="1200" kern="1200">
+        <a:solidFill>
+          <a:schemeClr val="tx1"/>
+        </a:solidFill>
+        <a:latin typeface="+mn-lt"/>
+        <a:ea typeface="+mn-ea"/>
+        <a:cs typeface="+mn-cs"/>
+      </a:defRPr>
+    </a:lvl3pPr>
+    <a:lvl4pPr marL="1371600" algn="l" defTabSz="914400" rtl="0" eaLnBrk="1" latinLnBrk="0" hangingPunct="1">
+      <a:defRPr sz="1200" kern="1200">
+        <a:solidFill>
+          <a:schemeClr val="tx1"/>
+        </a:solidFill>
+        <a:latin typeface="+mn-lt"/>
+        <a:ea typeface="+mn-ea"/>
+        <a:cs typeface="+mn-cs"/>
+      </a:defRPr>
+    </a:lvl4pPr>
+    <a:lvl5pPr marL="1828800" algn="l" defTabSz="914400" rtl="0" eaLnBrk="1" latinLnBrk="0" hangingPunct="1">
+      <a:defRPr sz="1200" kern="1200">
+        <a:solidFill>
+          <a:schemeClr val="tx1"/>
+        </a:solidFill>
+        <a:latin typeface="+mn-lt"/>
+        <a:ea typeface="+mn-ea"/>
+        <a:cs typeface="+mn-cs"/>
+      </a:defRPr>
+    </a:lvl5pPr>
+    <a:lvl6pPr marL="2286000" algn="l" defTabSz="914400" rtl="0" eaLnBrk="1" latinLnBrk="0" hangingPunct="1">
+      <a:defRPr sz="1200" kern="1200">
+        <a:solidFill>
+          <a:schemeClr val="tx1"/>
+        </a:solidFill>
+        <a:latin typeface="+mn-lt"/>
+        <a:ea typeface="+mn-ea"/>
+        <a:cs typeface="+mn-cs"/>
+      </a:defRPr>
+    </a:lvl6pPr>
+    <a:lvl7pPr marL="2743200" algn="l" defTabSz="914400" rtl="0" eaLnBrk="1" latinLnBrk="0" hangingPunct="1">
+      <a:defRPr sz="1200" kern="1200">
+        <a:solidFill>
+          <a:schemeClr val="tx1"/>
+        </a:solidFill>
+        <a:latin typeface="+mn-lt"/>
+        <a:ea typeface="+mn-ea"/>
+        <a:cs typeface="+mn-cs"/>
+      </a:defRPr>
+    </a:lvl7pPr>
+    <a:lvl8pPr marL="3200400" algn="l" defTabSz="914400" rtl="0" eaLnBrk="1" latinLnBrk="0" hangingPunct="1">
+      <a:defRPr sz="1200" kern="1200">
+        <a:solidFill>
+          <a:schemeClr val="tx1"/>
+        </a:solidFill>
+        <a:latin typeface="+mn-lt"/>
+        <a:ea typeface="+mn-ea"/>
+        <a:cs typeface="+mn-cs"/>
+      </a:defRPr>
+    </a:lvl8pPr>
+    <a:lvl9pPr marL="3657600" algn="l" defTabSz="914400" rtl="0" eaLnBrk="1" latinLnBrk="0" hangingPunct="1">
+      <a:defRPr sz="1200" kern="1200">
+        <a:solidFill>
+          <a:schemeClr val="tx1"/>
+        </a:solidFill>
+        <a:latin typeface="+mn-lt"/>
+        <a:ea typeface="+mn-ea"/>
+        <a:cs typeface="+mn-cs"/>
+      </a:defRPr>
+    </a:lvl9pPr>
+  </p:notesStyle>
+</p:notesMaster>
+</file>
+
+<file path=ppt/notesSlides/notesSlide1.xml><?xml version="1.0" encoding="utf-8"?>
+<p:notes xmlns:a="http://schemas.openxmlformats.org/drawingml/2006/main" xmlns:r="http://schemas.openxmlformats.org/officeDocument/2006/relationships" xmlns:p="http://schemas.openxmlformats.org/presentationml/2006/main">
+  <p:cSld>
+    <p:spTree>
+      <p:nvGrpSpPr>
+        <p:cNvPr id="1" name=""/>
+        <p:cNvGrpSpPr/>
+        <p:nvPr/>
+      </p:nvGrpSpPr>
+      <p:grpSpPr>
+        <a:xfrm>
+          <a:off x="0" y="0"/>
+          <a:ext cx="0" cy="0"/>
+          <a:chOff x="0" y="0"/>
+          <a:chExt cx="0" cy="0"/>
+        </a:xfrm>
+      </p:grpSpPr>
+      <p:sp>
+        <p:nvSpPr>
+          <p:cNvPr id="2" name="Slide Image Placeholder 1"/>
+          <p:cNvSpPr>
+            <a:spLocks noGrp="1" noRot="1" noChangeAspect="1"/>
+          </p:cNvSpPr>
+          <p:nvPr>
+            <p:ph type="sldImg"/>
+          </p:nvPr>
+        </p:nvSpPr>
+        <p:spPr/>
+      </p:sp>
+      <p:sp>
+        <p:nvSpPr>
+          <p:cNvPr id="3" name="Notes Placeholder 2"/>
+          <p:cNvSpPr>
+            <a:spLocks noGrp="1"/>
+          </p:cNvSpPr>
+          <p:nvPr>
+            <p:ph type="body" idx="1"/>
+          </p:nvPr>
+        </p:nvSpPr>
+        <p:spPr/>
+        <p:txBody>
+          <a:bodyPr/>
+          <a:lstStyle/>
+          <a:p>
+            <a:r>
+              <a:rPr lang="en-US" sz="1200" kern="1200" dirty="0">
+                <a:solidFill>
+                  <a:schemeClr val="tx1"/>
+                </a:solidFill>
+                <a:effectLst/>
+                <a:latin typeface="+mn-lt"/>
+                <a:ea typeface="+mn-ea"/>
+                <a:cs typeface="+mn-cs"/>
+              </a:rPr>
+              <a:t>“Hi everyone, I’m Naim.</a:t>
+            </a:r>
+          </a:p>
+          <a:p>
+            <a:r>
+              <a:rPr lang="en-US" sz="1200" kern="1200" dirty="0">
+                <a:solidFill>
+                  <a:schemeClr val="tx1"/>
+                </a:solidFill>
+                <a:effectLst/>
+                <a:latin typeface="+mn-lt"/>
+                <a:ea typeface="+mn-ea"/>
+                <a:cs typeface="+mn-cs"/>
+              </a:rPr>
+              <a:t>This presentation shows how </a:t>
+            </a:r>
+            <a:r>
+              <a:rPr lang="en-US" sz="1200" kern="1200" dirty="0" err="1">
+                <a:solidFill>
+                  <a:schemeClr val="tx1"/>
+                </a:solidFill>
+                <a:effectLst/>
+                <a:latin typeface="+mn-lt"/>
+                <a:ea typeface="+mn-ea"/>
+                <a:cs typeface="+mn-cs"/>
+              </a:rPr>
+              <a:t>CoinGecko</a:t>
+            </a:r>
+            <a:r>
+              <a:rPr lang="en-US" sz="1200" kern="1200" dirty="0">
+                <a:solidFill>
+                  <a:schemeClr val="tx1"/>
+                </a:solidFill>
+                <a:effectLst/>
+                <a:latin typeface="+mn-lt"/>
+                <a:ea typeface="+mn-ea"/>
+                <a:cs typeface="+mn-cs"/>
+              </a:rPr>
+              <a:t> can help </a:t>
+            </a:r>
+            <a:r>
+              <a:rPr lang="en-US" sz="1200" kern="1200" dirty="0" err="1">
+                <a:solidFill>
+                  <a:schemeClr val="tx1"/>
+                </a:solidFill>
+                <a:effectLst/>
+                <a:latin typeface="+mn-lt"/>
+                <a:ea typeface="+mn-ea"/>
+                <a:cs typeface="+mn-cs"/>
+              </a:rPr>
+              <a:t>DogePay</a:t>
+            </a:r>
+            <a:r>
+              <a:rPr lang="en-US" sz="1200" kern="1200" dirty="0">
+                <a:solidFill>
+                  <a:schemeClr val="tx1"/>
+                </a:solidFill>
+                <a:effectLst/>
+                <a:latin typeface="+mn-lt"/>
+                <a:ea typeface="+mn-ea"/>
+                <a:cs typeface="+mn-cs"/>
+              </a:rPr>
+              <a:t> launch crypto price tracking for 2M users today, while preparing the platform for trading in the future.”</a:t>
+            </a:r>
+          </a:p>
+          <a:p>
+            <a:endParaRPr lang="en-US" sz="1200" kern="1200" dirty="0">
+              <a:solidFill>
+                <a:schemeClr val="tx1"/>
+              </a:solidFill>
+              <a:effectLst/>
+              <a:latin typeface="+mn-lt"/>
+              <a:ea typeface="+mn-ea"/>
+              <a:cs typeface="+mn-cs"/>
+            </a:endParaRPr>
+          </a:p>
+          <a:p>
+            <a:r>
+              <a:rPr lang="en-US" sz="1200" kern="1200" dirty="0">
+                <a:solidFill>
+                  <a:schemeClr val="tx1"/>
+                </a:solidFill>
+                <a:effectLst/>
+                <a:latin typeface="+mn-lt"/>
+                <a:ea typeface="+mn-ea"/>
+                <a:cs typeface="+mn-cs"/>
+              </a:rPr>
+              <a:t>“Since this scenario simulates a first discovery call, I focused on three things:</a:t>
+            </a:r>
+          </a:p>
+          <a:p>
+            <a:r>
+              <a:rPr lang="en-US" sz="1200" kern="1200" dirty="0">
+                <a:solidFill>
+                  <a:schemeClr val="tx1"/>
+                </a:solidFill>
+                <a:effectLst/>
+                <a:latin typeface="+mn-lt"/>
+                <a:ea typeface="+mn-ea"/>
+                <a:cs typeface="+mn-cs"/>
+              </a:rPr>
+              <a:t>1) Building trust in the data provider,</a:t>
+            </a:r>
+          </a:p>
+          <a:p>
+            <a:r>
+              <a:rPr lang="en-US" sz="1200" kern="1200" dirty="0">
+                <a:solidFill>
+                  <a:schemeClr val="tx1"/>
+                </a:solidFill>
+                <a:effectLst/>
+                <a:latin typeface="+mn-lt"/>
+                <a:ea typeface="+mn-ea"/>
+                <a:cs typeface="+mn-cs"/>
+              </a:rPr>
+              <a:t>2) Showing a realistic rollout path,</a:t>
+            </a:r>
+          </a:p>
+          <a:p>
+            <a:r>
+              <a:rPr lang="en-US" sz="1200" kern="1200" dirty="0">
+                <a:solidFill>
+                  <a:schemeClr val="tx1"/>
+                </a:solidFill>
+                <a:effectLst/>
+                <a:latin typeface="+mn-lt"/>
+                <a:ea typeface="+mn-ea"/>
+                <a:cs typeface="+mn-cs"/>
+              </a:rPr>
+              <a:t>3) Making sure the architecture scales for millions of users.”</a:t>
+            </a:r>
+          </a:p>
+          <a:p>
+            <a:endParaRPr lang="en-US" dirty="0"/>
+          </a:p>
+        </p:txBody>
+      </p:sp>
+      <p:sp>
+        <p:nvSpPr>
+          <p:cNvPr id="4" name="Slide Number Placeholder 3"/>
+          <p:cNvSpPr>
+            <a:spLocks noGrp="1"/>
+          </p:cNvSpPr>
+          <p:nvPr>
+            <p:ph type="sldNum" sz="quarter" idx="5"/>
+          </p:nvPr>
+        </p:nvSpPr>
+        <p:spPr/>
+        <p:txBody>
+          <a:bodyPr/>
+          <a:lstStyle/>
+          <a:p>
+            <a:fld id="{BC96FA82-26EF-4C1E-9441-91F88F3006C0}" type="slidenum">
+              <a:rPr lang="en-US" smtClean="0"/>
+              <a:t>1</a:t>
+            </a:fld>
+            <a:endParaRPr lang="en-US"/>
+          </a:p>
+        </p:txBody>
+      </p:sp>
+    </p:spTree>
+    <p:extLst>
+      <p:ext uri="{BB962C8B-B14F-4D97-AF65-F5344CB8AC3E}">
+        <p14:creationId xmlns:p14="http://schemas.microsoft.com/office/powerpoint/2010/main" val="3194761304"/>
+      </p:ext>
+    </p:extLst>
+  </p:cSld>
+  <p:clrMapOvr>
+    <a:masterClrMapping/>
+  </p:clrMapOvr>
+</p:notes>
+</file>
+
+<file path=ppt/notesSlides/notesSlide10.xml><?xml version="1.0" encoding="utf-8"?>
+<p:notes xmlns:a="http://schemas.openxmlformats.org/drawingml/2006/main" xmlns:r="http://schemas.openxmlformats.org/officeDocument/2006/relationships" xmlns:p="http://schemas.openxmlformats.org/presentationml/2006/main">
+  <p:cSld>
+    <p:spTree>
+      <p:nvGrpSpPr>
+        <p:cNvPr id="1" name=""/>
+        <p:cNvGrpSpPr/>
+        <p:nvPr/>
+      </p:nvGrpSpPr>
+      <p:grpSpPr>
+        <a:xfrm>
+          <a:off x="0" y="0"/>
+          <a:ext cx="0" cy="0"/>
+          <a:chOff x="0" y="0"/>
+          <a:chExt cx="0" cy="0"/>
+        </a:xfrm>
+      </p:grpSpPr>
+      <p:sp>
+        <p:nvSpPr>
+          <p:cNvPr id="2" name="Slide Image Placeholder 1"/>
+          <p:cNvSpPr>
+            <a:spLocks noGrp="1" noRot="1" noChangeAspect="1"/>
+          </p:cNvSpPr>
+          <p:nvPr>
+            <p:ph type="sldImg"/>
+          </p:nvPr>
+        </p:nvSpPr>
+        <p:spPr/>
+      </p:sp>
+      <p:sp>
+        <p:nvSpPr>
+          <p:cNvPr id="3" name="Notes Placeholder 2"/>
+          <p:cNvSpPr>
+            <a:spLocks noGrp="1"/>
+          </p:cNvSpPr>
+          <p:nvPr>
+            <p:ph type="body" idx="1"/>
+          </p:nvPr>
+        </p:nvSpPr>
+        <p:spPr/>
+        <p:txBody>
+          <a:bodyPr/>
+          <a:lstStyle/>
+          <a:p>
+            <a:pPr rtl="0" fontAlgn="ctr"/>
+            <a:r>
+              <a:rPr lang="en-US" sz="1200" kern="1200" dirty="0">
+                <a:solidFill>
+                  <a:schemeClr val="tx1"/>
+                </a:solidFill>
+                <a:effectLst/>
+                <a:latin typeface="+mn-lt"/>
+                <a:ea typeface="+mn-ea"/>
+                <a:cs typeface="+mn-cs"/>
+              </a:rPr>
+              <a:t>From discussion to action</a:t>
+            </a:r>
+            <a:br>
+              <a:rPr lang="en-US" sz="1200" kern="1200" dirty="0">
+                <a:solidFill>
+                  <a:schemeClr val="tx1"/>
+                </a:solidFill>
+                <a:effectLst/>
+                <a:latin typeface="+mn-lt"/>
+                <a:ea typeface="+mn-ea"/>
+                <a:cs typeface="+mn-cs"/>
+              </a:rPr>
+            </a:br>
+            <a:br>
+              <a:rPr lang="en-US" sz="1200" kern="1200" dirty="0">
+                <a:solidFill>
+                  <a:schemeClr val="tx1"/>
+                </a:solidFill>
+                <a:effectLst/>
+                <a:latin typeface="+mn-lt"/>
+                <a:ea typeface="+mn-ea"/>
+                <a:cs typeface="+mn-cs"/>
+              </a:rPr>
+            </a:br>
+            <a:r>
+              <a:rPr lang="en-US" sz="1200" kern="1200" dirty="0">
+                <a:solidFill>
+                  <a:schemeClr val="tx1"/>
+                </a:solidFill>
+                <a:effectLst/>
+                <a:latin typeface="+mn-lt"/>
+                <a:ea typeface="+mn-ea"/>
+                <a:cs typeface="+mn-cs"/>
+              </a:rPr>
+              <a:t>message: ready to help </a:t>
+            </a:r>
+            <a:r>
+              <a:rPr lang="en-US" sz="1200" kern="1200" dirty="0" err="1">
+                <a:solidFill>
+                  <a:schemeClr val="tx1"/>
+                </a:solidFill>
+                <a:effectLst/>
+                <a:latin typeface="+mn-lt"/>
+                <a:ea typeface="+mn-ea"/>
+                <a:cs typeface="+mn-cs"/>
+              </a:rPr>
+              <a:t>DogePay</a:t>
+            </a:r>
+            <a:r>
+              <a:rPr lang="en-US" sz="1200" kern="1200" dirty="0">
+                <a:solidFill>
+                  <a:schemeClr val="tx1"/>
+                </a:solidFill>
+                <a:effectLst/>
+                <a:latin typeface="+mn-lt"/>
+                <a:ea typeface="+mn-ea"/>
+                <a:cs typeface="+mn-cs"/>
+              </a:rPr>
+              <a:t> move from discovery to deployment</a:t>
+            </a:r>
+          </a:p>
+          <a:p>
+            <a:pPr rtl="0" fontAlgn="ctr"/>
+            <a:r>
+              <a:rPr lang="en-US" sz="1200" kern="1200" dirty="0">
+                <a:solidFill>
+                  <a:schemeClr val="tx1"/>
+                </a:solidFill>
+                <a:effectLst/>
+                <a:latin typeface="+mn-lt"/>
+                <a:ea typeface="+mn-ea"/>
+                <a:cs typeface="+mn-cs"/>
+              </a:rPr>
+              <a:t>roadmap: discovery today, technical scoping in 48 hours, sandbox this week, proposal next week</a:t>
+            </a:r>
+          </a:p>
+          <a:p>
+            <a:endParaRPr lang="en-US" sz="1200" b="1" kern="1200" dirty="0">
+              <a:solidFill>
+                <a:schemeClr val="tx1"/>
+              </a:solidFill>
+              <a:effectLst/>
+              <a:latin typeface="+mn-lt"/>
+              <a:ea typeface="+mn-ea"/>
+              <a:cs typeface="+mn-cs"/>
+            </a:endParaRPr>
+          </a:p>
+          <a:p>
+            <a:r>
+              <a:rPr lang="en-US" sz="1200" b="1" kern="1200" dirty="0">
+                <a:solidFill>
+                  <a:schemeClr val="tx1"/>
+                </a:solidFill>
+                <a:effectLst/>
+                <a:latin typeface="+mn-lt"/>
+                <a:ea typeface="+mn-ea"/>
+                <a:cs typeface="+mn-cs"/>
+              </a:rPr>
+              <a:t>Close:</a:t>
+            </a:r>
+            <a:endParaRPr lang="en-US" sz="1200" kern="1200" dirty="0">
+              <a:solidFill>
+                <a:schemeClr val="tx1"/>
+              </a:solidFill>
+              <a:effectLst/>
+              <a:latin typeface="+mn-lt"/>
+              <a:ea typeface="+mn-ea"/>
+              <a:cs typeface="+mn-cs"/>
+            </a:endParaRPr>
+          </a:p>
+          <a:p>
+            <a:r>
+              <a:rPr lang="en-US" sz="1200" kern="1200" dirty="0">
+                <a:solidFill>
+                  <a:schemeClr val="tx1"/>
+                </a:solidFill>
+                <a:effectLst/>
+                <a:latin typeface="+mn-lt"/>
+                <a:ea typeface="+mn-ea"/>
+                <a:cs typeface="+mn-cs"/>
+              </a:rPr>
+              <a:t>“Thanks for reviewing — I’m looking forward for questions.”</a:t>
+            </a:r>
+          </a:p>
+          <a:p>
+            <a:endParaRPr lang="en-US" dirty="0"/>
+          </a:p>
+        </p:txBody>
+      </p:sp>
+      <p:sp>
+        <p:nvSpPr>
+          <p:cNvPr id="4" name="Slide Number Placeholder 3"/>
+          <p:cNvSpPr>
+            <a:spLocks noGrp="1"/>
+          </p:cNvSpPr>
+          <p:nvPr>
+            <p:ph type="sldNum" sz="quarter" idx="5"/>
+          </p:nvPr>
+        </p:nvSpPr>
+        <p:spPr/>
+        <p:txBody>
+          <a:bodyPr/>
+          <a:lstStyle/>
+          <a:p>
+            <a:fld id="{BC96FA82-26EF-4C1E-9441-91F88F3006C0}" type="slidenum">
+              <a:rPr lang="en-US" smtClean="0"/>
+              <a:t>10</a:t>
+            </a:fld>
+            <a:endParaRPr lang="en-US"/>
+          </a:p>
+        </p:txBody>
+      </p:sp>
+    </p:spTree>
+    <p:extLst>
+      <p:ext uri="{BB962C8B-B14F-4D97-AF65-F5344CB8AC3E}">
+        <p14:creationId xmlns:p14="http://schemas.microsoft.com/office/powerpoint/2010/main" val="1185030989"/>
+      </p:ext>
+    </p:extLst>
+  </p:cSld>
+  <p:clrMapOvr>
+    <a:masterClrMapping/>
+  </p:clrMapOvr>
+</p:notes>
+</file>
+
+<file path=ppt/notesSlides/notesSlide2.xml><?xml version="1.0" encoding="utf-8"?>
+<p:notes xmlns:a="http://schemas.openxmlformats.org/drawingml/2006/main" xmlns:r="http://schemas.openxmlformats.org/officeDocument/2006/relationships" xmlns:p="http://schemas.openxmlformats.org/presentationml/2006/main">
+  <p:cSld>
+    <p:spTree>
+      <p:nvGrpSpPr>
+        <p:cNvPr id="1" name=""/>
+        <p:cNvGrpSpPr/>
+        <p:nvPr/>
+      </p:nvGrpSpPr>
+      <p:grpSpPr>
+        <a:xfrm>
+          <a:off x="0" y="0"/>
+          <a:ext cx="0" cy="0"/>
+          <a:chOff x="0" y="0"/>
+          <a:chExt cx="0" cy="0"/>
+        </a:xfrm>
+      </p:grpSpPr>
+      <p:sp>
+        <p:nvSpPr>
+          <p:cNvPr id="2" name="Slide Image Placeholder 1"/>
+          <p:cNvSpPr>
+            <a:spLocks noGrp="1" noRot="1" noChangeAspect="1"/>
+          </p:cNvSpPr>
+          <p:nvPr>
+            <p:ph type="sldImg"/>
+          </p:nvPr>
+        </p:nvSpPr>
+        <p:spPr/>
+      </p:sp>
+      <p:sp>
+        <p:nvSpPr>
+          <p:cNvPr id="3" name="Notes Placeholder 2"/>
+          <p:cNvSpPr>
+            <a:spLocks noGrp="1"/>
+          </p:cNvSpPr>
+          <p:nvPr>
+            <p:ph type="body" idx="1"/>
+          </p:nvPr>
+        </p:nvSpPr>
+        <p:spPr/>
+        <p:txBody>
+          <a:bodyPr/>
+          <a:lstStyle/>
+          <a:p>
+            <a:r>
+              <a:rPr lang="en-US" sz="1200" kern="1200" dirty="0">
+                <a:solidFill>
+                  <a:schemeClr val="tx1"/>
+                </a:solidFill>
+                <a:effectLst/>
+                <a:latin typeface="+mn-lt"/>
+                <a:ea typeface="+mn-ea"/>
+                <a:cs typeface="+mn-cs"/>
+              </a:rPr>
+              <a:t>For a regulated fintech like </a:t>
+            </a:r>
+            <a:r>
+              <a:rPr lang="en-US" sz="1200" kern="1200" dirty="0" err="1">
+                <a:solidFill>
+                  <a:schemeClr val="tx1"/>
+                </a:solidFill>
+                <a:effectLst/>
+                <a:latin typeface="+mn-lt"/>
+                <a:ea typeface="+mn-ea"/>
+                <a:cs typeface="+mn-cs"/>
+              </a:rPr>
+              <a:t>DogePay</a:t>
+            </a:r>
+            <a:r>
+              <a:rPr lang="en-US" sz="1200" kern="1200" dirty="0">
+                <a:solidFill>
+                  <a:schemeClr val="tx1"/>
+                </a:solidFill>
+                <a:effectLst/>
+                <a:latin typeface="+mn-lt"/>
+                <a:ea typeface="+mn-ea"/>
+                <a:cs typeface="+mn-cs"/>
+              </a:rPr>
+              <a:t>, independence matters.</a:t>
+            </a:r>
+          </a:p>
+          <a:p>
+            <a:r>
+              <a:rPr lang="en-US" sz="1200" kern="1200" dirty="0" err="1">
+                <a:solidFill>
+                  <a:schemeClr val="tx1"/>
+                </a:solidFill>
+                <a:effectLst/>
+                <a:latin typeface="+mn-lt"/>
+                <a:ea typeface="+mn-ea"/>
+                <a:cs typeface="+mn-cs"/>
+              </a:rPr>
+              <a:t>CoinGecko</a:t>
+            </a:r>
+            <a:r>
+              <a:rPr lang="en-US" sz="1200" kern="1200" dirty="0">
+                <a:solidFill>
+                  <a:schemeClr val="tx1"/>
+                </a:solidFill>
+                <a:effectLst/>
+                <a:latin typeface="+mn-lt"/>
+                <a:ea typeface="+mn-ea"/>
+                <a:cs typeface="+mn-cs"/>
+              </a:rPr>
+              <a:t> aggregates data across 1,400 exchanges rather than operating an exchange itself, which removes conflicts of interest.”</a:t>
+            </a:r>
+          </a:p>
+          <a:p>
+            <a:endParaRPr lang="en-US" dirty="0"/>
+          </a:p>
+          <a:p>
+            <a:endParaRPr lang="en-US" dirty="0"/>
+          </a:p>
+        </p:txBody>
+      </p:sp>
+      <p:sp>
+        <p:nvSpPr>
+          <p:cNvPr id="4" name="Slide Number Placeholder 3"/>
+          <p:cNvSpPr>
+            <a:spLocks noGrp="1"/>
+          </p:cNvSpPr>
+          <p:nvPr>
+            <p:ph type="sldNum" sz="quarter" idx="5"/>
+          </p:nvPr>
+        </p:nvSpPr>
+        <p:spPr/>
+        <p:txBody>
+          <a:bodyPr/>
+          <a:lstStyle/>
+          <a:p>
+            <a:fld id="{BC96FA82-26EF-4C1E-9441-91F88F3006C0}" type="slidenum">
+              <a:rPr lang="en-US" smtClean="0"/>
+              <a:t>2</a:t>
+            </a:fld>
+            <a:endParaRPr lang="en-US"/>
+          </a:p>
+        </p:txBody>
+      </p:sp>
+    </p:spTree>
+    <p:extLst>
+      <p:ext uri="{BB962C8B-B14F-4D97-AF65-F5344CB8AC3E}">
+        <p14:creationId xmlns:p14="http://schemas.microsoft.com/office/powerpoint/2010/main" val="682509212"/>
+      </p:ext>
+    </p:extLst>
+  </p:cSld>
+  <p:clrMapOvr>
+    <a:masterClrMapping/>
+  </p:clrMapOvr>
+</p:notes>
+</file>
+
+<file path=ppt/notesSlides/notesSlide3.xml><?xml version="1.0" encoding="utf-8"?>
+<p:notes xmlns:a="http://schemas.openxmlformats.org/drawingml/2006/main" xmlns:r="http://schemas.openxmlformats.org/officeDocument/2006/relationships" xmlns:p="http://schemas.openxmlformats.org/presentationml/2006/main">
+  <p:cSld>
+    <p:spTree>
+      <p:nvGrpSpPr>
+        <p:cNvPr id="1" name=""/>
+        <p:cNvGrpSpPr/>
+        <p:nvPr/>
+      </p:nvGrpSpPr>
+      <p:grpSpPr>
+        <a:xfrm>
+          <a:off x="0" y="0"/>
+          <a:ext cx="0" cy="0"/>
+          <a:chOff x="0" y="0"/>
+          <a:chExt cx="0" cy="0"/>
+        </a:xfrm>
+      </p:grpSpPr>
+      <p:sp>
+        <p:nvSpPr>
+          <p:cNvPr id="2" name="Slide Image Placeholder 1"/>
+          <p:cNvSpPr>
+            <a:spLocks noGrp="1" noRot="1" noChangeAspect="1"/>
+          </p:cNvSpPr>
+          <p:nvPr>
+            <p:ph type="sldImg"/>
+          </p:nvPr>
+        </p:nvSpPr>
+        <p:spPr/>
+      </p:sp>
+      <p:sp>
+        <p:nvSpPr>
+          <p:cNvPr id="3" name="Notes Placeholder 2"/>
+          <p:cNvSpPr>
+            <a:spLocks noGrp="1"/>
+          </p:cNvSpPr>
+          <p:nvPr>
+            <p:ph type="body" idx="1"/>
+          </p:nvPr>
+        </p:nvSpPr>
+        <p:spPr/>
+        <p:txBody>
+          <a:bodyPr/>
+          <a:lstStyle/>
+          <a:p>
+            <a:r>
+              <a:rPr lang="en-US" sz="1200" kern="1200" dirty="0">
+                <a:solidFill>
+                  <a:schemeClr val="tx1"/>
+                </a:solidFill>
+                <a:effectLst/>
+                <a:latin typeface="+mn-lt"/>
+                <a:ea typeface="+mn-ea"/>
+                <a:cs typeface="+mn-cs"/>
+              </a:rPr>
+              <a:t>“This slide is really about risk reduction.”</a:t>
+            </a:r>
+          </a:p>
+          <a:p>
+            <a:endParaRPr lang="en-US" sz="1200" kern="1200" dirty="0">
+              <a:solidFill>
+                <a:schemeClr val="tx1"/>
+              </a:solidFill>
+              <a:effectLst/>
+              <a:latin typeface="+mn-lt"/>
+              <a:ea typeface="+mn-ea"/>
+              <a:cs typeface="+mn-cs"/>
+            </a:endParaRPr>
+          </a:p>
+          <a:p>
+            <a:endParaRPr lang="en-US" sz="1200" kern="1200" dirty="0">
+              <a:solidFill>
+                <a:schemeClr val="tx1"/>
+              </a:solidFill>
+              <a:effectLst/>
+              <a:latin typeface="+mn-lt"/>
+              <a:ea typeface="+mn-ea"/>
+              <a:cs typeface="+mn-cs"/>
+            </a:endParaRPr>
+          </a:p>
+          <a:p>
+            <a:r>
+              <a:rPr lang="en-US" sz="1200" kern="1200" dirty="0">
+                <a:solidFill>
+                  <a:schemeClr val="tx1"/>
+                </a:solidFill>
+                <a:effectLst/>
+                <a:latin typeface="+mn-lt"/>
+                <a:ea typeface="+mn-ea"/>
+                <a:cs typeface="+mn-cs"/>
+              </a:rPr>
+              <a:t>These aren't checkboxes for us. They're how we built the product from day one.</a:t>
+            </a:r>
+            <a:endParaRPr lang="en-US" dirty="0"/>
+          </a:p>
+        </p:txBody>
+      </p:sp>
+      <p:sp>
+        <p:nvSpPr>
+          <p:cNvPr id="4" name="Slide Number Placeholder 3"/>
+          <p:cNvSpPr>
+            <a:spLocks noGrp="1"/>
+          </p:cNvSpPr>
+          <p:nvPr>
+            <p:ph type="sldNum" sz="quarter" idx="5"/>
+          </p:nvPr>
+        </p:nvSpPr>
+        <p:spPr/>
+        <p:txBody>
+          <a:bodyPr/>
+          <a:lstStyle/>
+          <a:p>
+            <a:fld id="{BC96FA82-26EF-4C1E-9441-91F88F3006C0}" type="slidenum">
+              <a:rPr lang="en-US" smtClean="0"/>
+              <a:t>3</a:t>
+            </a:fld>
+            <a:endParaRPr lang="en-US"/>
+          </a:p>
+        </p:txBody>
+      </p:sp>
+    </p:spTree>
+    <p:extLst>
+      <p:ext uri="{BB962C8B-B14F-4D97-AF65-F5344CB8AC3E}">
+        <p14:creationId xmlns:p14="http://schemas.microsoft.com/office/powerpoint/2010/main" val="2244858592"/>
+      </p:ext>
+    </p:extLst>
+  </p:cSld>
+  <p:clrMapOvr>
+    <a:masterClrMapping/>
+  </p:clrMapOvr>
+</p:notes>
+</file>
+
+<file path=ppt/notesSlides/notesSlide4.xml><?xml version="1.0" encoding="utf-8"?>
+<p:notes xmlns:a="http://schemas.openxmlformats.org/drawingml/2006/main" xmlns:r="http://schemas.openxmlformats.org/officeDocument/2006/relationships" xmlns:p="http://schemas.openxmlformats.org/presentationml/2006/main">
+  <p:cSld>
+    <p:spTree>
+      <p:nvGrpSpPr>
+        <p:cNvPr id="1" name=""/>
+        <p:cNvGrpSpPr/>
+        <p:nvPr/>
+      </p:nvGrpSpPr>
+      <p:grpSpPr>
+        <a:xfrm>
+          <a:off x="0" y="0"/>
+          <a:ext cx="0" cy="0"/>
+          <a:chOff x="0" y="0"/>
+          <a:chExt cx="0" cy="0"/>
+        </a:xfrm>
+      </p:grpSpPr>
+      <p:sp>
+        <p:nvSpPr>
+          <p:cNvPr id="2" name="Slide Image Placeholder 1"/>
+          <p:cNvSpPr>
+            <a:spLocks noGrp="1" noRot="1" noChangeAspect="1"/>
+          </p:cNvSpPr>
+          <p:nvPr>
+            <p:ph type="sldImg"/>
+          </p:nvPr>
+        </p:nvSpPr>
+        <p:spPr/>
+      </p:sp>
+      <p:sp>
+        <p:nvSpPr>
+          <p:cNvPr id="3" name="Notes Placeholder 2"/>
+          <p:cNvSpPr>
+            <a:spLocks noGrp="1"/>
+          </p:cNvSpPr>
+          <p:nvPr>
+            <p:ph type="body" idx="1"/>
+          </p:nvPr>
+        </p:nvSpPr>
+        <p:spPr/>
+        <p:txBody>
+          <a:bodyPr/>
+          <a:lstStyle/>
+          <a:p>
+            <a:r>
+              <a:rPr lang="en-US" sz="1200" kern="1200" dirty="0">
+                <a:solidFill>
+                  <a:schemeClr val="tx1"/>
+                </a:solidFill>
+                <a:effectLst/>
+                <a:latin typeface="+mn-lt"/>
+                <a:ea typeface="+mn-ea"/>
+                <a:cs typeface="+mn-cs"/>
+              </a:rPr>
+              <a:t>This is the commercial fit slide.</a:t>
+            </a:r>
+            <a:br>
+              <a:rPr lang="en-US" sz="1200" kern="1200" dirty="0">
+                <a:solidFill>
+                  <a:schemeClr val="tx1"/>
+                </a:solidFill>
+                <a:effectLst/>
+                <a:latin typeface="+mn-lt"/>
+                <a:ea typeface="+mn-ea"/>
+                <a:cs typeface="+mn-cs"/>
+              </a:rPr>
+            </a:br>
+            <a:br>
+              <a:rPr lang="en-US" sz="1200" kern="1200" dirty="0">
+                <a:solidFill>
+                  <a:schemeClr val="tx1"/>
+                </a:solidFill>
+                <a:effectLst/>
+                <a:latin typeface="+mn-lt"/>
+                <a:ea typeface="+mn-ea"/>
+                <a:cs typeface="+mn-cs"/>
+              </a:rPr>
+            </a:br>
+            <a:endParaRPr lang="en-US" dirty="0"/>
+          </a:p>
+        </p:txBody>
+      </p:sp>
+      <p:sp>
+        <p:nvSpPr>
+          <p:cNvPr id="4" name="Slide Number Placeholder 3"/>
+          <p:cNvSpPr>
+            <a:spLocks noGrp="1"/>
+          </p:cNvSpPr>
+          <p:nvPr>
+            <p:ph type="sldNum" sz="quarter" idx="5"/>
+          </p:nvPr>
+        </p:nvSpPr>
+        <p:spPr/>
+        <p:txBody>
+          <a:bodyPr/>
+          <a:lstStyle/>
+          <a:p>
+            <a:fld id="{BC96FA82-26EF-4C1E-9441-91F88F3006C0}" type="slidenum">
+              <a:rPr lang="en-US" smtClean="0"/>
+              <a:t>4</a:t>
+            </a:fld>
+            <a:endParaRPr lang="en-US"/>
+          </a:p>
+        </p:txBody>
+      </p:sp>
+    </p:spTree>
+    <p:extLst>
+      <p:ext uri="{BB962C8B-B14F-4D97-AF65-F5344CB8AC3E}">
+        <p14:creationId xmlns:p14="http://schemas.microsoft.com/office/powerpoint/2010/main" val="21326959"/>
+      </p:ext>
+    </p:extLst>
+  </p:cSld>
+  <p:clrMapOvr>
+    <a:masterClrMapping/>
+  </p:clrMapOvr>
+</p:notes>
+</file>
+
+<file path=ppt/notesSlides/notesSlide5.xml><?xml version="1.0" encoding="utf-8"?>
+<p:notes xmlns:a="http://schemas.openxmlformats.org/drawingml/2006/main" xmlns:r="http://schemas.openxmlformats.org/officeDocument/2006/relationships" xmlns:p="http://schemas.openxmlformats.org/presentationml/2006/main">
+  <p:cSld>
+    <p:spTree>
+      <p:nvGrpSpPr>
+        <p:cNvPr id="1" name=""/>
+        <p:cNvGrpSpPr/>
+        <p:nvPr/>
+      </p:nvGrpSpPr>
+      <p:grpSpPr>
+        <a:xfrm>
+          <a:off x="0" y="0"/>
+          <a:ext cx="0" cy="0"/>
+          <a:chOff x="0" y="0"/>
+          <a:chExt cx="0" cy="0"/>
+        </a:xfrm>
+      </p:grpSpPr>
+      <p:sp>
+        <p:nvSpPr>
+          <p:cNvPr id="2" name="Slide Image Placeholder 1"/>
+          <p:cNvSpPr>
+            <a:spLocks noGrp="1" noRot="1" noChangeAspect="1"/>
+          </p:cNvSpPr>
+          <p:nvPr>
+            <p:ph type="sldImg"/>
+          </p:nvPr>
+        </p:nvSpPr>
+        <p:spPr/>
+      </p:sp>
+      <p:sp>
+        <p:nvSpPr>
+          <p:cNvPr id="3" name="Notes Placeholder 2"/>
+          <p:cNvSpPr>
+            <a:spLocks noGrp="1"/>
+          </p:cNvSpPr>
+          <p:nvPr>
+            <p:ph type="body" idx="1"/>
+          </p:nvPr>
+        </p:nvSpPr>
+        <p:spPr/>
+        <p:txBody>
+          <a:bodyPr/>
+          <a:lstStyle/>
+          <a:p>
+            <a:r>
+              <a:rPr lang="en-US" sz="1200" kern="1200" dirty="0">
+                <a:solidFill>
+                  <a:schemeClr val="tx1"/>
+                </a:solidFill>
+                <a:effectLst/>
+                <a:latin typeface="+mn-lt"/>
+                <a:ea typeface="+mn-ea"/>
+                <a:cs typeface="+mn-cs"/>
+              </a:rPr>
+              <a:t>How </a:t>
+            </a:r>
+            <a:br>
+              <a:rPr lang="en-US" sz="1200" kern="1200" dirty="0">
+                <a:solidFill>
+                  <a:schemeClr val="tx1"/>
+                </a:solidFill>
+                <a:effectLst/>
+                <a:latin typeface="+mn-lt"/>
+                <a:ea typeface="+mn-ea"/>
+                <a:cs typeface="+mn-cs"/>
+              </a:rPr>
+            </a:br>
+            <a:br>
+              <a:rPr lang="en-US" sz="1200" kern="1200" dirty="0">
+                <a:solidFill>
+                  <a:schemeClr val="tx1"/>
+                </a:solidFill>
+                <a:effectLst/>
+                <a:latin typeface="+mn-lt"/>
+                <a:ea typeface="+mn-ea"/>
+                <a:cs typeface="+mn-cs"/>
+              </a:rPr>
+            </a:br>
+            <a:r>
+              <a:rPr lang="en-US" sz="1200" kern="1200" dirty="0">
+                <a:solidFill>
+                  <a:schemeClr val="tx1"/>
+                </a:solidFill>
+                <a:effectLst/>
+                <a:latin typeface="+mn-lt"/>
+                <a:ea typeface="+mn-ea"/>
+                <a:cs typeface="+mn-cs"/>
+              </a:rPr>
+              <a:t>“I kept the product story modular. start small scale later</a:t>
+            </a:r>
+          </a:p>
+          <a:p>
+            <a:r>
+              <a:rPr lang="en-US" sz="1200" kern="1200" dirty="0">
+                <a:solidFill>
+                  <a:schemeClr val="tx1"/>
+                </a:solidFill>
+                <a:effectLst/>
+                <a:latin typeface="+mn-lt"/>
+                <a:ea typeface="+mn-ea"/>
+                <a:cs typeface="+mn-cs"/>
+              </a:rPr>
+              <a:t>”</a:t>
+            </a:r>
+          </a:p>
+          <a:p>
+            <a:r>
+              <a:rPr lang="en-US" sz="1200" b="1" kern="1200" dirty="0">
+                <a:solidFill>
+                  <a:schemeClr val="tx1"/>
+                </a:solidFill>
+                <a:effectLst/>
+                <a:latin typeface="+mn-lt"/>
+                <a:ea typeface="+mn-ea"/>
+                <a:cs typeface="+mn-cs"/>
+              </a:rPr>
+              <a:t>3 cue points:</a:t>
+            </a:r>
+            <a:endParaRPr lang="en-US" sz="1200" kern="1200" dirty="0">
+              <a:solidFill>
+                <a:schemeClr val="tx1"/>
+              </a:solidFill>
+              <a:effectLst/>
+              <a:latin typeface="+mn-lt"/>
+              <a:ea typeface="+mn-ea"/>
+              <a:cs typeface="+mn-cs"/>
+            </a:endParaRPr>
+          </a:p>
+          <a:p>
+            <a:pPr rtl="0" fontAlgn="ctr"/>
+            <a:r>
+              <a:rPr lang="en-US" sz="1200" kern="1200" dirty="0">
+                <a:solidFill>
+                  <a:schemeClr val="tx1"/>
+                </a:solidFill>
+                <a:effectLst/>
+                <a:latin typeface="+mn-lt"/>
+                <a:ea typeface="+mn-ea"/>
+                <a:cs typeface="+mn-cs"/>
+              </a:rPr>
+              <a:t>REST API is the Phase 1 core for market data, metadata, and historical records</a:t>
+            </a:r>
+          </a:p>
+          <a:p>
+            <a:pPr rtl="0" fontAlgn="ctr"/>
+            <a:r>
+              <a:rPr lang="en-US" sz="1200" kern="1200" dirty="0">
+                <a:solidFill>
+                  <a:schemeClr val="tx1"/>
+                </a:solidFill>
+                <a:effectLst/>
+                <a:latin typeface="+mn-lt"/>
+                <a:ea typeface="+mn-ea"/>
+                <a:cs typeface="+mn-cs"/>
+              </a:rPr>
+              <a:t>WebSocket is Phase 2 ready for real-time trading interfaces</a:t>
+            </a:r>
+          </a:p>
+          <a:p>
+            <a:pPr rtl="0" fontAlgn="ctr"/>
+            <a:r>
+              <a:rPr lang="en-US" sz="1200" kern="1200" dirty="0">
+                <a:solidFill>
+                  <a:schemeClr val="tx1"/>
+                </a:solidFill>
+                <a:effectLst/>
+                <a:latin typeface="+mn-lt"/>
+                <a:ea typeface="+mn-ea"/>
+                <a:cs typeface="+mn-cs"/>
+              </a:rPr>
+              <a:t>SDKs and tooling reduce implementation time; extras are there but not central to this conversation</a:t>
+            </a:r>
+          </a:p>
+          <a:p>
+            <a:r>
+              <a:rPr lang="en-US" sz="1200" b="1" kern="1200" dirty="0">
+                <a:solidFill>
+                  <a:schemeClr val="tx1"/>
+                </a:solidFill>
+                <a:effectLst/>
+                <a:latin typeface="+mn-lt"/>
+                <a:ea typeface="+mn-ea"/>
+                <a:cs typeface="+mn-cs"/>
+              </a:rPr>
+              <a:t>Transition:</a:t>
+            </a:r>
+            <a:endParaRPr lang="en-US" sz="1200" kern="1200" dirty="0">
+              <a:solidFill>
+                <a:schemeClr val="tx1"/>
+              </a:solidFill>
+              <a:effectLst/>
+              <a:latin typeface="+mn-lt"/>
+              <a:ea typeface="+mn-ea"/>
+              <a:cs typeface="+mn-cs"/>
+            </a:endParaRPr>
+          </a:p>
+          <a:p>
+            <a:r>
+              <a:rPr lang="en-US" sz="1200" kern="1200" dirty="0">
+                <a:solidFill>
+                  <a:schemeClr val="tx1"/>
+                </a:solidFill>
+                <a:effectLst/>
+                <a:latin typeface="+mn-lt"/>
+                <a:ea typeface="+mn-ea"/>
+                <a:cs typeface="+mn-cs"/>
+              </a:rPr>
+              <a:t>“The most important part is how that product stack maps directly to </a:t>
+            </a:r>
+            <a:r>
+              <a:rPr lang="en-US" sz="1200" kern="1200" dirty="0" err="1">
+                <a:solidFill>
+                  <a:schemeClr val="tx1"/>
+                </a:solidFill>
+                <a:effectLst/>
+                <a:latin typeface="+mn-lt"/>
+                <a:ea typeface="+mn-ea"/>
+                <a:cs typeface="+mn-cs"/>
+              </a:rPr>
+              <a:t>DogePay’s</a:t>
+            </a:r>
+            <a:r>
+              <a:rPr lang="en-US" sz="1200" kern="1200" dirty="0">
+                <a:solidFill>
+                  <a:schemeClr val="tx1"/>
+                </a:solidFill>
+                <a:effectLst/>
+                <a:latin typeface="+mn-lt"/>
+                <a:ea typeface="+mn-ea"/>
+                <a:cs typeface="+mn-cs"/>
+              </a:rPr>
+              <a:t> roadmap.”</a:t>
+            </a:r>
+          </a:p>
+          <a:p>
+            <a:endParaRPr lang="en-US" dirty="0"/>
+          </a:p>
+        </p:txBody>
+      </p:sp>
+      <p:sp>
+        <p:nvSpPr>
+          <p:cNvPr id="4" name="Slide Number Placeholder 3"/>
+          <p:cNvSpPr>
+            <a:spLocks noGrp="1"/>
+          </p:cNvSpPr>
+          <p:nvPr>
+            <p:ph type="sldNum" sz="quarter" idx="5"/>
+          </p:nvPr>
+        </p:nvSpPr>
+        <p:spPr/>
+        <p:txBody>
+          <a:bodyPr/>
+          <a:lstStyle/>
+          <a:p>
+            <a:fld id="{BC96FA82-26EF-4C1E-9441-91F88F3006C0}" type="slidenum">
+              <a:rPr lang="en-US" smtClean="0"/>
+              <a:t>5</a:t>
+            </a:fld>
+            <a:endParaRPr lang="en-US"/>
+          </a:p>
+        </p:txBody>
+      </p:sp>
+    </p:spTree>
+    <p:extLst>
+      <p:ext uri="{BB962C8B-B14F-4D97-AF65-F5344CB8AC3E}">
+        <p14:creationId xmlns:p14="http://schemas.microsoft.com/office/powerpoint/2010/main" val="943710568"/>
+      </p:ext>
+    </p:extLst>
+  </p:cSld>
+  <p:clrMapOvr>
+    <a:masterClrMapping/>
+  </p:clrMapOvr>
+</p:notes>
+</file>
+
+<file path=ppt/notesSlides/notesSlide6.xml><?xml version="1.0" encoding="utf-8"?>
+<p:notes xmlns:a="http://schemas.openxmlformats.org/drawingml/2006/main" xmlns:r="http://schemas.openxmlformats.org/officeDocument/2006/relationships" xmlns:p="http://schemas.openxmlformats.org/presentationml/2006/main">
+  <p:cSld>
+    <p:spTree>
+      <p:nvGrpSpPr>
+        <p:cNvPr id="1" name=""/>
+        <p:cNvGrpSpPr/>
+        <p:nvPr/>
+      </p:nvGrpSpPr>
+      <p:grpSpPr>
+        <a:xfrm>
+          <a:off x="0" y="0"/>
+          <a:ext cx="0" cy="0"/>
+          <a:chOff x="0" y="0"/>
+          <a:chExt cx="0" cy="0"/>
+        </a:xfrm>
+      </p:grpSpPr>
+      <p:sp>
+        <p:nvSpPr>
+          <p:cNvPr id="2" name="Slide Image Placeholder 1"/>
+          <p:cNvSpPr>
+            <a:spLocks noGrp="1" noRot="1" noChangeAspect="1"/>
+          </p:cNvSpPr>
+          <p:nvPr>
+            <p:ph type="sldImg"/>
+          </p:nvPr>
+        </p:nvSpPr>
+        <p:spPr/>
+      </p:sp>
+      <p:sp>
+        <p:nvSpPr>
+          <p:cNvPr id="3" name="Notes Placeholder 2"/>
+          <p:cNvSpPr>
+            <a:spLocks noGrp="1"/>
+          </p:cNvSpPr>
+          <p:nvPr>
+            <p:ph type="body" idx="1"/>
+          </p:nvPr>
+        </p:nvSpPr>
+        <p:spPr/>
+        <p:txBody>
+          <a:bodyPr/>
+          <a:lstStyle/>
+          <a:p>
+            <a:r>
+              <a:rPr lang="en-US" sz="1200" kern="1200" dirty="0">
+                <a:solidFill>
+                  <a:schemeClr val="tx1"/>
+                </a:solidFill>
+                <a:effectLst/>
+                <a:latin typeface="+mn-lt"/>
+                <a:ea typeface="+mn-ea"/>
+                <a:cs typeface="+mn-cs"/>
+              </a:rPr>
+              <a:t>“This is the most tailored slide in the deck.”</a:t>
+            </a:r>
+          </a:p>
+          <a:p>
+            <a:r>
+              <a:rPr lang="en-US" sz="1200" b="1" kern="1200" dirty="0">
+                <a:solidFill>
+                  <a:schemeClr val="tx1"/>
+                </a:solidFill>
+                <a:effectLst/>
+                <a:latin typeface="+mn-lt"/>
+                <a:ea typeface="+mn-ea"/>
+                <a:cs typeface="+mn-cs"/>
+              </a:rPr>
+              <a:t>3 cue points:</a:t>
+            </a:r>
+            <a:endParaRPr lang="en-US" sz="1200" kern="1200" dirty="0">
+              <a:solidFill>
+                <a:schemeClr val="tx1"/>
+              </a:solidFill>
+              <a:effectLst/>
+              <a:latin typeface="+mn-lt"/>
+              <a:ea typeface="+mn-ea"/>
+              <a:cs typeface="+mn-cs"/>
+            </a:endParaRPr>
+          </a:p>
+          <a:p>
+            <a:pPr rtl="0" fontAlgn="ctr"/>
+            <a:r>
+              <a:rPr lang="en-US" sz="1200" kern="1200" dirty="0">
+                <a:solidFill>
+                  <a:schemeClr val="tx1"/>
+                </a:solidFill>
+                <a:effectLst/>
+                <a:latin typeface="+mn-lt"/>
+                <a:ea typeface="+mn-ea"/>
+                <a:cs typeface="+mn-cs"/>
+              </a:rPr>
+              <a:t>Phase 1: /simple/price, /coins/markets, and /</a:t>
+            </a:r>
+            <a:r>
+              <a:rPr lang="en-US" sz="1200" kern="1200" dirty="0" err="1">
+                <a:solidFill>
+                  <a:schemeClr val="tx1"/>
+                </a:solidFill>
+                <a:effectLst/>
+                <a:latin typeface="+mn-lt"/>
+                <a:ea typeface="+mn-ea"/>
+                <a:cs typeface="+mn-cs"/>
+              </a:rPr>
+              <a:t>market_chart</a:t>
+            </a:r>
+            <a:r>
+              <a:rPr lang="en-US" sz="1200" kern="1200" dirty="0">
+                <a:solidFill>
+                  <a:schemeClr val="tx1"/>
+                </a:solidFill>
+                <a:effectLst/>
+                <a:latin typeface="+mn-lt"/>
+                <a:ea typeface="+mn-ea"/>
+                <a:cs typeface="+mn-cs"/>
+              </a:rPr>
+              <a:t> cover price tracking, dashboards, and charts</a:t>
+            </a:r>
+          </a:p>
+          <a:p>
+            <a:pPr rtl="0" fontAlgn="ctr"/>
+            <a:endParaRPr lang="en-US" sz="1200" kern="1200" dirty="0">
+              <a:solidFill>
+                <a:schemeClr val="tx1"/>
+              </a:solidFill>
+              <a:effectLst/>
+              <a:latin typeface="+mn-lt"/>
+              <a:ea typeface="+mn-ea"/>
+              <a:cs typeface="+mn-cs"/>
+            </a:endParaRPr>
+          </a:p>
+          <a:p>
+            <a:pPr rtl="0" fontAlgn="ctr"/>
+            <a:r>
+              <a:rPr lang="en-US" sz="1200" kern="1200" dirty="0">
+                <a:solidFill>
+                  <a:schemeClr val="tx1"/>
+                </a:solidFill>
+                <a:effectLst/>
+                <a:latin typeface="+mn-lt"/>
+                <a:ea typeface="+mn-ea"/>
+                <a:cs typeface="+mn-cs"/>
+              </a:rPr>
+              <a:t>Phase 2: WebSocket, tickers, and exchange data support pre-trading and execution needs</a:t>
+            </a:r>
+          </a:p>
+          <a:p>
+            <a:pPr rtl="0" fontAlgn="ctr"/>
+            <a:endParaRPr lang="en-US" sz="1200" kern="1200" dirty="0">
+              <a:solidFill>
+                <a:schemeClr val="tx1"/>
+              </a:solidFill>
+              <a:effectLst/>
+              <a:latin typeface="+mn-lt"/>
+              <a:ea typeface="+mn-ea"/>
+              <a:cs typeface="+mn-cs"/>
+            </a:endParaRPr>
+          </a:p>
+          <a:p>
+            <a:pPr rtl="0" fontAlgn="ctr"/>
+            <a:r>
+              <a:rPr lang="en-US" sz="1200" kern="1200" dirty="0">
+                <a:solidFill>
+                  <a:schemeClr val="tx1"/>
+                </a:solidFill>
+                <a:effectLst/>
+                <a:latin typeface="+mn-lt"/>
+                <a:ea typeface="+mn-ea"/>
+                <a:cs typeface="+mn-cs"/>
+              </a:rPr>
+              <a:t>this shows a clean roadmap from immediate launch needs to trading readiness later</a:t>
+            </a:r>
+          </a:p>
+          <a:p>
+            <a:endParaRPr lang="en-US" dirty="0"/>
+          </a:p>
+          <a:p>
+            <a:r>
+              <a:rPr lang="en-US" sz="1200" kern="1200" dirty="0">
+                <a:solidFill>
+                  <a:schemeClr val="tx1"/>
+                </a:solidFill>
+                <a:effectLst/>
+                <a:latin typeface="+mn-lt"/>
+                <a:ea typeface="+mn-ea"/>
+                <a:cs typeface="+mn-cs"/>
+              </a:rPr>
+              <a:t>Does this match what your team was thinking architecturally, or are there constraints I should know about?</a:t>
+            </a:r>
+            <a:br>
+              <a:rPr lang="en-US" sz="1200" b="1" kern="1200" dirty="0">
+                <a:solidFill>
+                  <a:schemeClr val="tx1"/>
+                </a:solidFill>
+                <a:effectLst/>
+                <a:latin typeface="+mn-lt"/>
+                <a:ea typeface="+mn-ea"/>
+                <a:cs typeface="+mn-cs"/>
+              </a:rPr>
+            </a:br>
+            <a:r>
+              <a:rPr lang="en-US" sz="1200" kern="1200" dirty="0">
+                <a:solidFill>
+                  <a:schemeClr val="tx1"/>
+                </a:solidFill>
+                <a:effectLst/>
+                <a:latin typeface="+mn-lt"/>
+                <a:ea typeface="+mn-ea"/>
+                <a:cs typeface="+mn-cs"/>
+              </a:rPr>
+              <a:t> </a:t>
+            </a:r>
+            <a:endParaRPr lang="en-US" dirty="0"/>
+          </a:p>
+        </p:txBody>
+      </p:sp>
+      <p:sp>
+        <p:nvSpPr>
+          <p:cNvPr id="4" name="Slide Number Placeholder 3"/>
+          <p:cNvSpPr>
+            <a:spLocks noGrp="1"/>
+          </p:cNvSpPr>
+          <p:nvPr>
+            <p:ph type="sldNum" sz="quarter" idx="5"/>
+          </p:nvPr>
+        </p:nvSpPr>
+        <p:spPr/>
+        <p:txBody>
+          <a:bodyPr/>
+          <a:lstStyle/>
+          <a:p>
+            <a:fld id="{BC96FA82-26EF-4C1E-9441-91F88F3006C0}" type="slidenum">
+              <a:rPr lang="en-US" smtClean="0"/>
+              <a:t>6</a:t>
+            </a:fld>
+            <a:endParaRPr lang="en-US"/>
+          </a:p>
+        </p:txBody>
+      </p:sp>
+    </p:spTree>
+    <p:extLst>
+      <p:ext uri="{BB962C8B-B14F-4D97-AF65-F5344CB8AC3E}">
+        <p14:creationId xmlns:p14="http://schemas.microsoft.com/office/powerpoint/2010/main" val="1197970599"/>
+      </p:ext>
+    </p:extLst>
+  </p:cSld>
+  <p:clrMapOvr>
+    <a:masterClrMapping/>
+  </p:clrMapOvr>
+</p:notes>
+</file>
+
+<file path=ppt/notesSlides/notesSlide7.xml><?xml version="1.0" encoding="utf-8"?>
+<p:notes xmlns:a="http://schemas.openxmlformats.org/drawingml/2006/main" xmlns:r="http://schemas.openxmlformats.org/officeDocument/2006/relationships" xmlns:p="http://schemas.openxmlformats.org/presentationml/2006/main">
+  <p:cSld>
+    <p:spTree>
+      <p:nvGrpSpPr>
+        <p:cNvPr id="1" name=""/>
+        <p:cNvGrpSpPr/>
+        <p:nvPr/>
+      </p:nvGrpSpPr>
+      <p:grpSpPr>
+        <a:xfrm>
+          <a:off x="0" y="0"/>
+          <a:ext cx="0" cy="0"/>
+          <a:chOff x="0" y="0"/>
+          <a:chExt cx="0" cy="0"/>
+        </a:xfrm>
+      </p:grpSpPr>
+      <p:sp>
+        <p:nvSpPr>
+          <p:cNvPr id="2" name="Slide Image Placeholder 1"/>
+          <p:cNvSpPr>
+            <a:spLocks noGrp="1" noRot="1" noChangeAspect="1"/>
+          </p:cNvSpPr>
+          <p:nvPr>
+            <p:ph type="sldImg"/>
+          </p:nvPr>
+        </p:nvSpPr>
+        <p:spPr/>
+      </p:sp>
+      <p:sp>
+        <p:nvSpPr>
+          <p:cNvPr id="3" name="Notes Placeholder 2"/>
+          <p:cNvSpPr>
+            <a:spLocks noGrp="1"/>
+          </p:cNvSpPr>
+          <p:nvPr>
+            <p:ph type="body" idx="1"/>
+          </p:nvPr>
+        </p:nvSpPr>
+        <p:spPr/>
+        <p:txBody>
+          <a:bodyPr/>
+          <a:lstStyle/>
+          <a:p>
+            <a:r>
+              <a:rPr lang="en-US" sz="1200" kern="1200" dirty="0">
+                <a:solidFill>
+                  <a:schemeClr val="tx1"/>
+                </a:solidFill>
+                <a:effectLst/>
+                <a:latin typeface="+mn-lt"/>
+                <a:ea typeface="+mn-ea"/>
+                <a:cs typeface="+mn-cs"/>
+              </a:rPr>
+              <a:t>This is the more technical depth slide.</a:t>
+            </a:r>
+          </a:p>
+          <a:p>
+            <a:endParaRPr lang="en-US" sz="1200" b="1" kern="1200" dirty="0">
+              <a:solidFill>
+                <a:schemeClr val="tx1"/>
+              </a:solidFill>
+              <a:effectLst/>
+              <a:latin typeface="+mn-lt"/>
+              <a:ea typeface="+mn-ea"/>
+              <a:cs typeface="+mn-cs"/>
+            </a:endParaRPr>
+          </a:p>
+          <a:p>
+            <a:r>
+              <a:rPr lang="en-US" sz="1200" b="1" kern="1200" dirty="0">
+                <a:solidFill>
+                  <a:schemeClr val="tx1"/>
+                </a:solidFill>
+                <a:effectLst/>
+                <a:latin typeface="+mn-lt"/>
+                <a:ea typeface="+mn-ea"/>
+                <a:cs typeface="+mn-cs"/>
+              </a:rPr>
+              <a:t>3 cue points:</a:t>
+            </a:r>
+            <a:endParaRPr lang="en-US" sz="1200" kern="1200" dirty="0">
+              <a:solidFill>
+                <a:schemeClr val="tx1"/>
+              </a:solidFill>
+              <a:effectLst/>
+              <a:latin typeface="+mn-lt"/>
+              <a:ea typeface="+mn-ea"/>
+              <a:cs typeface="+mn-cs"/>
+            </a:endParaRPr>
+          </a:p>
+          <a:p>
+            <a:pPr rtl="0" fontAlgn="ctr"/>
+            <a:r>
+              <a:rPr lang="en-US" sz="1200" kern="1200" dirty="0">
+                <a:solidFill>
+                  <a:schemeClr val="tx1"/>
+                </a:solidFill>
+                <a:effectLst/>
+                <a:latin typeface="+mn-lt"/>
+                <a:ea typeface="+mn-ea"/>
+                <a:cs typeface="+mn-cs"/>
+              </a:rPr>
+              <a:t>How does this scale to 2 million users without blowing up our API budget? The answer is in Redis caching </a:t>
+            </a:r>
+          </a:p>
+          <a:p>
+            <a:pPr rtl="0" fontAlgn="ctr"/>
+            <a:r>
+              <a:rPr lang="en-US" sz="1200" kern="1200" dirty="0">
+                <a:solidFill>
+                  <a:schemeClr val="tx1"/>
+                </a:solidFill>
+                <a:effectLst/>
+                <a:latin typeface="+mn-lt"/>
+                <a:ea typeface="+mn-ea"/>
+                <a:cs typeface="+mn-cs"/>
+              </a:rPr>
+              <a:t>estimated load stays around 5k to 10k calls a day, which keeps Phase 1 commercially efficient</a:t>
+            </a:r>
+          </a:p>
+          <a:p>
+            <a:pPr rtl="0" fontAlgn="ctr"/>
+            <a:endParaRPr lang="en-US" sz="1200" kern="1200" dirty="0">
+              <a:solidFill>
+                <a:schemeClr val="tx1"/>
+              </a:solidFill>
+              <a:effectLst/>
+              <a:latin typeface="+mn-lt"/>
+              <a:ea typeface="+mn-ea"/>
+              <a:cs typeface="+mn-cs"/>
+            </a:endParaRPr>
+          </a:p>
+          <a:p>
+            <a:pPr rtl="0" fontAlgn="ctr"/>
+            <a:r>
+              <a:rPr lang="en-US" sz="1200" kern="1200" dirty="0">
+                <a:solidFill>
+                  <a:schemeClr val="tx1"/>
+                </a:solidFill>
+                <a:effectLst/>
+                <a:latin typeface="+mn-lt"/>
+                <a:ea typeface="+mn-ea"/>
+                <a:cs typeface="+mn-cs"/>
+              </a:rPr>
+              <a:t>API keys stay on the backend, and </a:t>
+            </a:r>
+          </a:p>
+          <a:p>
+            <a:pPr rtl="0" fontAlgn="ctr"/>
+            <a:endParaRPr lang="en-US" sz="1200" kern="1200" dirty="0">
+              <a:solidFill>
+                <a:schemeClr val="tx1"/>
+              </a:solidFill>
+              <a:effectLst/>
+              <a:latin typeface="+mn-lt"/>
+              <a:ea typeface="+mn-ea"/>
+              <a:cs typeface="+mn-cs"/>
+            </a:endParaRPr>
+          </a:p>
+          <a:p>
+            <a:pPr rtl="0" fontAlgn="ctr"/>
+            <a:r>
+              <a:rPr lang="en-US" sz="1200" kern="1200" dirty="0">
+                <a:solidFill>
+                  <a:schemeClr val="tx1"/>
+                </a:solidFill>
+                <a:effectLst/>
+                <a:latin typeface="+mn-lt"/>
+                <a:ea typeface="+mn-ea"/>
+                <a:cs typeface="+mn-cs"/>
+              </a:rPr>
+              <a:t>WebSocket becomes the natural upgrade path for Phase 2</a:t>
+            </a:r>
+          </a:p>
+          <a:p>
+            <a:endParaRPr lang="en-US" dirty="0"/>
+          </a:p>
+        </p:txBody>
+      </p:sp>
+      <p:sp>
+        <p:nvSpPr>
+          <p:cNvPr id="4" name="Slide Number Placeholder 3"/>
+          <p:cNvSpPr>
+            <a:spLocks noGrp="1"/>
+          </p:cNvSpPr>
+          <p:nvPr>
+            <p:ph type="sldNum" sz="quarter" idx="5"/>
+          </p:nvPr>
+        </p:nvSpPr>
+        <p:spPr/>
+        <p:txBody>
+          <a:bodyPr/>
+          <a:lstStyle/>
+          <a:p>
+            <a:fld id="{BC96FA82-26EF-4C1E-9441-91F88F3006C0}" type="slidenum">
+              <a:rPr lang="en-US" smtClean="0"/>
+              <a:t>7</a:t>
+            </a:fld>
+            <a:endParaRPr lang="en-US"/>
+          </a:p>
+        </p:txBody>
+      </p:sp>
+    </p:spTree>
+    <p:extLst>
+      <p:ext uri="{BB962C8B-B14F-4D97-AF65-F5344CB8AC3E}">
+        <p14:creationId xmlns:p14="http://schemas.microsoft.com/office/powerpoint/2010/main" val="3367752167"/>
+      </p:ext>
+    </p:extLst>
+  </p:cSld>
+  <p:clrMapOvr>
+    <a:masterClrMapping/>
+  </p:clrMapOvr>
+</p:notes>
+</file>
+
+<file path=ppt/notesSlides/notesSlide8.xml><?xml version="1.0" encoding="utf-8"?>
+<p:notes xmlns:a="http://schemas.openxmlformats.org/drawingml/2006/main" xmlns:r="http://schemas.openxmlformats.org/officeDocument/2006/relationships" xmlns:p="http://schemas.openxmlformats.org/presentationml/2006/main">
+  <p:cSld>
+    <p:spTree>
+      <p:nvGrpSpPr>
+        <p:cNvPr id="1" name=""/>
+        <p:cNvGrpSpPr/>
+        <p:nvPr/>
+      </p:nvGrpSpPr>
+      <p:grpSpPr>
+        <a:xfrm>
+          <a:off x="0" y="0"/>
+          <a:ext cx="0" cy="0"/>
+          <a:chOff x="0" y="0"/>
+          <a:chExt cx="0" cy="0"/>
+        </a:xfrm>
+      </p:grpSpPr>
+      <p:sp>
+        <p:nvSpPr>
+          <p:cNvPr id="2" name="Slide Image Placeholder 1"/>
+          <p:cNvSpPr>
+            <a:spLocks noGrp="1" noRot="1" noChangeAspect="1"/>
+          </p:cNvSpPr>
+          <p:nvPr>
+            <p:ph type="sldImg"/>
+          </p:nvPr>
+        </p:nvSpPr>
+        <p:spPr/>
+      </p:sp>
+      <p:sp>
+        <p:nvSpPr>
+          <p:cNvPr id="3" name="Notes Placeholder 2"/>
+          <p:cNvSpPr>
+            <a:spLocks noGrp="1"/>
+          </p:cNvSpPr>
+          <p:nvPr>
+            <p:ph type="body" idx="1"/>
+          </p:nvPr>
+        </p:nvSpPr>
+        <p:spPr/>
+        <p:txBody>
+          <a:bodyPr/>
+          <a:lstStyle/>
+          <a:p>
+            <a:r>
+              <a:rPr lang="en-US" sz="1200" kern="1200" dirty="0">
+                <a:solidFill>
+                  <a:schemeClr val="tx1"/>
+                </a:solidFill>
+                <a:effectLst/>
+                <a:latin typeface="+mn-lt"/>
+                <a:ea typeface="+mn-ea"/>
+                <a:cs typeface="+mn-cs"/>
+              </a:rPr>
+              <a:t>his slide is confirmation, not persuasion..”</a:t>
+            </a:r>
+          </a:p>
+          <a:p>
+            <a:r>
+              <a:rPr lang="en-US" sz="1200" b="1" kern="1200" dirty="0">
+                <a:solidFill>
+                  <a:schemeClr val="tx1"/>
+                </a:solidFill>
+                <a:effectLst/>
+                <a:latin typeface="+mn-lt"/>
+                <a:ea typeface="+mn-ea"/>
+                <a:cs typeface="+mn-cs"/>
+              </a:rPr>
+              <a:t>3 cue points:</a:t>
+            </a:r>
+            <a:endParaRPr lang="en-US" sz="1200" kern="1200" dirty="0">
+              <a:solidFill>
+                <a:schemeClr val="tx1"/>
+              </a:solidFill>
+              <a:effectLst/>
+              <a:latin typeface="+mn-lt"/>
+              <a:ea typeface="+mn-ea"/>
+              <a:cs typeface="+mn-cs"/>
+            </a:endParaRPr>
+          </a:p>
+          <a:p>
+            <a:pPr rtl="0" fontAlgn="ctr"/>
+            <a:r>
+              <a:rPr lang="en-US" sz="1200" kern="1200" dirty="0">
+                <a:solidFill>
+                  <a:schemeClr val="tx1"/>
+                </a:solidFill>
+                <a:effectLst/>
+                <a:latin typeface="+mn-lt"/>
+                <a:ea typeface="+mn-ea"/>
+                <a:cs typeface="+mn-cs"/>
+              </a:rPr>
+              <a:t>Demo is for prototyping, Analyst is the right Phase 1 recommendation, Enterprise is for mission-critical trading later</a:t>
+            </a:r>
+          </a:p>
+          <a:p>
+            <a:pPr rtl="0" fontAlgn="ctr"/>
+            <a:r>
+              <a:rPr lang="en-US" sz="1200" kern="1200" dirty="0">
+                <a:solidFill>
+                  <a:schemeClr val="tx1"/>
+                </a:solidFill>
+                <a:effectLst/>
+                <a:latin typeface="+mn-lt"/>
+                <a:ea typeface="+mn-ea"/>
+                <a:cs typeface="+mn-cs"/>
+              </a:rPr>
+              <a:t>Analyst fits the cached architecture and allows commercial use at a manageable cost</a:t>
+            </a:r>
+          </a:p>
+          <a:p>
+            <a:pPr rtl="0" fontAlgn="ctr"/>
+            <a:r>
+              <a:rPr lang="en-US" sz="1200" kern="1200" dirty="0">
+                <a:solidFill>
+                  <a:schemeClr val="tx1"/>
+                </a:solidFill>
+                <a:effectLst/>
+                <a:latin typeface="+mn-lt"/>
+                <a:ea typeface="+mn-ea"/>
+                <a:cs typeface="+mn-cs"/>
+              </a:rPr>
+              <a:t>the message here is transparent pricing, scalable growth, and no overbuying too early</a:t>
+            </a:r>
+          </a:p>
+          <a:p>
+            <a:endParaRPr lang="en-US" dirty="0"/>
+          </a:p>
+          <a:p>
+            <a:r>
+              <a:rPr lang="en-US" sz="1200" kern="1200" dirty="0">
+                <a:solidFill>
+                  <a:schemeClr val="tx1"/>
+                </a:solidFill>
+                <a:effectLst/>
+                <a:latin typeface="+mn-lt"/>
+                <a:ea typeface="+mn-ea"/>
+                <a:cs typeface="+mn-cs"/>
+              </a:rPr>
+              <a:t>Then I shift from presenting to discovering</a:t>
+            </a:r>
+            <a:endParaRPr lang="en-US" dirty="0"/>
+          </a:p>
+        </p:txBody>
+      </p:sp>
+      <p:sp>
+        <p:nvSpPr>
+          <p:cNvPr id="4" name="Slide Number Placeholder 3"/>
+          <p:cNvSpPr>
+            <a:spLocks noGrp="1"/>
+          </p:cNvSpPr>
+          <p:nvPr>
+            <p:ph type="sldNum" sz="quarter" idx="5"/>
+          </p:nvPr>
+        </p:nvSpPr>
+        <p:spPr/>
+        <p:txBody>
+          <a:bodyPr/>
+          <a:lstStyle/>
+          <a:p>
+            <a:fld id="{BC96FA82-26EF-4C1E-9441-91F88F3006C0}" type="slidenum">
+              <a:rPr lang="en-US" smtClean="0"/>
+              <a:t>8</a:t>
+            </a:fld>
+            <a:endParaRPr lang="en-US"/>
+          </a:p>
+        </p:txBody>
+      </p:sp>
+    </p:spTree>
+    <p:extLst>
+      <p:ext uri="{BB962C8B-B14F-4D97-AF65-F5344CB8AC3E}">
+        <p14:creationId xmlns:p14="http://schemas.microsoft.com/office/powerpoint/2010/main" val="4017781399"/>
+      </p:ext>
+    </p:extLst>
+  </p:cSld>
+  <p:clrMapOvr>
+    <a:masterClrMapping/>
+  </p:clrMapOvr>
+</p:notes>
+</file>
+
+<file path=ppt/notesSlides/notesSlide9.xml><?xml version="1.0" encoding="utf-8"?>
+<p:notes xmlns:a="http://schemas.openxmlformats.org/drawingml/2006/main" xmlns:r="http://schemas.openxmlformats.org/officeDocument/2006/relationships" xmlns:p="http://schemas.openxmlformats.org/presentationml/2006/main">
+  <p:cSld>
+    <p:spTree>
+      <p:nvGrpSpPr>
+        <p:cNvPr id="1" name=""/>
+        <p:cNvGrpSpPr/>
+        <p:nvPr/>
+      </p:nvGrpSpPr>
+      <p:grpSpPr>
+        <a:xfrm>
+          <a:off x="0" y="0"/>
+          <a:ext cx="0" cy="0"/>
+          <a:chOff x="0" y="0"/>
+          <a:chExt cx="0" cy="0"/>
+        </a:xfrm>
+      </p:grpSpPr>
+      <p:sp>
+        <p:nvSpPr>
+          <p:cNvPr id="2" name="Slide Image Placeholder 1"/>
+          <p:cNvSpPr>
+            <a:spLocks noGrp="1" noRot="1" noChangeAspect="1"/>
+          </p:cNvSpPr>
+          <p:nvPr>
+            <p:ph type="sldImg"/>
+          </p:nvPr>
+        </p:nvSpPr>
+        <p:spPr/>
+      </p:sp>
+      <p:sp>
+        <p:nvSpPr>
+          <p:cNvPr id="3" name="Notes Placeholder 2"/>
+          <p:cNvSpPr>
+            <a:spLocks noGrp="1"/>
+          </p:cNvSpPr>
+          <p:nvPr>
+            <p:ph type="body" idx="1"/>
+          </p:nvPr>
+        </p:nvSpPr>
+        <p:spPr/>
+        <p:txBody>
+          <a:bodyPr/>
+          <a:lstStyle/>
+          <a:p>
+            <a:r>
+              <a:rPr lang="en-US" sz="1200" kern="1200" dirty="0">
+                <a:solidFill>
+                  <a:schemeClr val="tx1"/>
+                </a:solidFill>
+                <a:effectLst/>
+                <a:latin typeface="+mn-lt"/>
+                <a:ea typeface="+mn-ea"/>
+                <a:cs typeface="+mn-cs"/>
+              </a:rPr>
+              <a:t>Without knowing all these, cost modeling is just an estimate.</a:t>
+            </a:r>
+            <a:endParaRPr lang="en-US" dirty="0"/>
+          </a:p>
+        </p:txBody>
+      </p:sp>
+      <p:sp>
+        <p:nvSpPr>
+          <p:cNvPr id="4" name="Slide Number Placeholder 3"/>
+          <p:cNvSpPr>
+            <a:spLocks noGrp="1"/>
+          </p:cNvSpPr>
+          <p:nvPr>
+            <p:ph type="sldNum" sz="quarter" idx="5"/>
+          </p:nvPr>
+        </p:nvSpPr>
+        <p:spPr/>
+        <p:txBody>
+          <a:bodyPr/>
+          <a:lstStyle/>
+          <a:p>
+            <a:fld id="{BC96FA82-26EF-4C1E-9441-91F88F3006C0}" type="slidenum">
+              <a:rPr lang="en-US" smtClean="0"/>
+              <a:t>9</a:t>
+            </a:fld>
+            <a:endParaRPr lang="en-US"/>
+          </a:p>
+        </p:txBody>
+      </p:sp>
+    </p:spTree>
+    <p:extLst>
+      <p:ext uri="{BB962C8B-B14F-4D97-AF65-F5344CB8AC3E}">
+        <p14:creationId xmlns:p14="http://schemas.microsoft.com/office/powerpoint/2010/main" val="1374907896"/>
+      </p:ext>
+    </p:extLst>
+  </p:cSld>
+  <p:clrMapOvr>
+    <a:masterClrMapping/>
+  </p:clrMapOvr>
+</p:notes>
 </file>
 
 <file path=ppt/slideLayouts/slideLayout1.xml><?xml version="1.0" encoding="utf-8"?>
@@ -154,10 +2390,9 @@
           <a:lstStyle/>
           <a:p>
             <a:r>
-              <a:rPr lang="en-US" smtClean="0"/>
+              <a:rPr lang="en-US"/>
               <a:t>Click to edit Master title style</a:t>
             </a:r>
-            <a:endParaRPr lang="en-US"/>
           </a:p>
         </p:txBody>
       </p:sp>
@@ -273,10 +2508,9 @@
           </a:lstStyle>
           <a:p>
             <a:r>
-              <a:rPr lang="en-US" smtClean="0"/>
+              <a:rPr lang="en-US"/>
               <a:t>Click to edit Master subtitle style</a:t>
             </a:r>
-            <a:endParaRPr lang="en-US"/>
           </a:p>
         </p:txBody>
       </p:sp>
@@ -297,7 +2531,7 @@
           <a:p>
             <a:fld id="{5BCAD085-E8A6-8845-BD4E-CB4CCA059FC4}" type="datetimeFigureOut">
               <a:rPr lang="en-US" smtClean="0"/>
-              <a:t>1/27/13</a:t>
+              <a:t>3/17/2026</a:t>
             </a:fld>
             <a:endParaRPr lang="en-US"/>
           </a:p>
@@ -391,10 +2625,9 @@
           <a:lstStyle/>
           <a:p>
             <a:r>
-              <a:rPr lang="en-US" smtClean="0"/>
+              <a:rPr lang="en-US"/>
               <a:t>Click to edit Master title style</a:t>
             </a:r>
-            <a:endParaRPr lang="en-US"/>
           </a:p>
         </p:txBody>
       </p:sp>
@@ -415,38 +2648,37 @@
           <a:p>
             <a:pPr lvl="0"/>
             <a:r>
-              <a:rPr lang="en-US" smtClean="0"/>
+              <a:rPr lang="en-US"/>
               <a:t>Click to edit Master text styles</a:t>
             </a:r>
           </a:p>
           <a:p>
             <a:pPr lvl="1"/>
             <a:r>
-              <a:rPr lang="en-US" smtClean="0"/>
+              <a:rPr lang="en-US"/>
               <a:t>Second level</a:t>
             </a:r>
           </a:p>
           <a:p>
             <a:pPr lvl="2"/>
             <a:r>
-              <a:rPr lang="en-US" smtClean="0"/>
+              <a:rPr lang="en-US"/>
               <a:t>Third level</a:t>
             </a:r>
           </a:p>
           <a:p>
             <a:pPr lvl="3"/>
             <a:r>
-              <a:rPr lang="en-US" smtClean="0"/>
+              <a:rPr lang="en-US"/>
               <a:t>Fourth level</a:t>
             </a:r>
           </a:p>
           <a:p>
             <a:pPr lvl="4"/>
             <a:r>
-              <a:rPr lang="en-US" smtClean="0"/>
+              <a:rPr lang="en-US"/>
               <a:t>Fifth level</a:t>
             </a:r>
-            <a:endParaRPr lang="en-US"/>
           </a:p>
         </p:txBody>
       </p:sp>
@@ -467,7 +2699,7 @@
           <a:p>
             <a:fld id="{5BCAD085-E8A6-8845-BD4E-CB4CCA059FC4}" type="datetimeFigureOut">
               <a:rPr lang="en-US" smtClean="0"/>
-              <a:t>1/27/13</a:t>
+              <a:t>3/17/2026</a:t>
             </a:fld>
             <a:endParaRPr lang="en-US"/>
           </a:p>
@@ -566,10 +2798,9 @@
           <a:lstStyle/>
           <a:p>
             <a:r>
-              <a:rPr lang="en-US" smtClean="0"/>
+              <a:rPr lang="en-US"/>
               <a:t>Click to edit Master title style</a:t>
             </a:r>
-            <a:endParaRPr lang="en-US"/>
           </a:p>
         </p:txBody>
       </p:sp>
@@ -595,38 +2826,37 @@
           <a:p>
             <a:pPr lvl="0"/>
             <a:r>
-              <a:rPr lang="en-US" smtClean="0"/>
+              <a:rPr lang="en-US"/>
               <a:t>Click to edit Master text styles</a:t>
             </a:r>
           </a:p>
           <a:p>
             <a:pPr lvl="1"/>
             <a:r>
-              <a:rPr lang="en-US" smtClean="0"/>
+              <a:rPr lang="en-US"/>
               <a:t>Second level</a:t>
             </a:r>
           </a:p>
           <a:p>
             <a:pPr lvl="2"/>
             <a:r>
-              <a:rPr lang="en-US" smtClean="0"/>
+              <a:rPr lang="en-US"/>
               <a:t>Third level</a:t>
             </a:r>
           </a:p>
           <a:p>
             <a:pPr lvl="3"/>
             <a:r>
-              <a:rPr lang="en-US" smtClean="0"/>
+              <a:rPr lang="en-US"/>
               <a:t>Fourth level</a:t>
             </a:r>
           </a:p>
           <a:p>
             <a:pPr lvl="4"/>
             <a:r>
-              <a:rPr lang="en-US" smtClean="0"/>
+              <a:rPr lang="en-US"/>
               <a:t>Fifth level</a:t>
             </a:r>
-            <a:endParaRPr lang="en-US"/>
           </a:p>
         </p:txBody>
       </p:sp>
@@ -647,7 +2877,7 @@
           <a:p>
             <a:fld id="{5BCAD085-E8A6-8845-BD4E-CB4CCA059FC4}" type="datetimeFigureOut">
               <a:rPr lang="en-US" smtClean="0"/>
-              <a:t>1/27/13</a:t>
+              <a:t>3/17/2026</a:t>
             </a:fld>
             <a:endParaRPr lang="en-US"/>
           </a:p>
@@ -741,10 +2971,9 @@
           <a:lstStyle/>
           <a:p>
             <a:r>
-              <a:rPr lang="en-US" smtClean="0"/>
+              <a:rPr lang="en-US"/>
               <a:t>Click to edit Master title style</a:t>
             </a:r>
-            <a:endParaRPr lang="en-US"/>
           </a:p>
         </p:txBody>
       </p:sp>
@@ -765,38 +2994,37 @@
           <a:p>
             <a:pPr lvl="0"/>
             <a:r>
-              <a:rPr lang="en-US" smtClean="0"/>
+              <a:rPr lang="en-US"/>
               <a:t>Click to edit Master text styles</a:t>
             </a:r>
           </a:p>
           <a:p>
             <a:pPr lvl="1"/>
             <a:r>
-              <a:rPr lang="en-US" smtClean="0"/>
+              <a:rPr lang="en-US"/>
               <a:t>Second level</a:t>
             </a:r>
           </a:p>
           <a:p>
             <a:pPr lvl="2"/>
             <a:r>
-              <a:rPr lang="en-US" smtClean="0"/>
+              <a:rPr lang="en-US"/>
               <a:t>Third level</a:t>
             </a:r>
           </a:p>
           <a:p>
             <a:pPr lvl="3"/>
             <a:r>
-              <a:rPr lang="en-US" smtClean="0"/>
+              <a:rPr lang="en-US"/>
               <a:t>Fourth level</a:t>
             </a:r>
           </a:p>
           <a:p>
             <a:pPr lvl="4"/>
             <a:r>
-              <a:rPr lang="en-US" smtClean="0"/>
+              <a:rPr lang="en-US"/>
               <a:t>Fifth level</a:t>
             </a:r>
-            <a:endParaRPr lang="en-US"/>
           </a:p>
         </p:txBody>
       </p:sp>
@@ -817,7 +3045,7 @@
           <a:p>
             <a:fld id="{5BCAD085-E8A6-8845-BD4E-CB4CCA059FC4}" type="datetimeFigureOut">
               <a:rPr lang="en-US" smtClean="0"/>
-              <a:t>1/27/13</a:t>
+              <a:t>3/17/2026</a:t>
             </a:fld>
             <a:endParaRPr lang="en-US"/>
           </a:p>
@@ -920,10 +3148,9 @@
           </a:lstStyle>
           <a:p>
             <a:r>
-              <a:rPr lang="en-US" smtClean="0"/>
+              <a:rPr lang="en-US"/>
               <a:t>Click to edit Master title style</a:t>
             </a:r>
-            <a:endParaRPr lang="en-US"/>
           </a:p>
         </p:txBody>
       </p:sp>
@@ -1040,7 +3267,7 @@
           <a:p>
             <a:pPr lvl="0"/>
             <a:r>
-              <a:rPr lang="en-US" smtClean="0"/>
+              <a:rPr lang="en-US"/>
               <a:t>Click to edit Master text styles</a:t>
             </a:r>
           </a:p>
@@ -1063,7 +3290,7 @@
           <a:p>
             <a:fld id="{5BCAD085-E8A6-8845-BD4E-CB4CCA059FC4}" type="datetimeFigureOut">
               <a:rPr lang="en-US" smtClean="0"/>
-              <a:t>1/27/13</a:t>
+              <a:t>3/17/2026</a:t>
             </a:fld>
             <a:endParaRPr lang="en-US"/>
           </a:p>
@@ -1157,10 +3384,9 @@
           <a:lstStyle/>
           <a:p>
             <a:r>
-              <a:rPr lang="en-US" smtClean="0"/>
+              <a:rPr lang="en-US"/>
               <a:t>Click to edit Master title style</a:t>
             </a:r>
-            <a:endParaRPr lang="en-US"/>
           </a:p>
         </p:txBody>
       </p:sp>
@@ -1214,38 +3440,37 @@
           <a:p>
             <a:pPr lvl="0"/>
             <a:r>
-              <a:rPr lang="en-US" smtClean="0"/>
+              <a:rPr lang="en-US"/>
               <a:t>Click to edit Master text styles</a:t>
             </a:r>
           </a:p>
           <a:p>
             <a:pPr lvl="1"/>
             <a:r>
-              <a:rPr lang="en-US" smtClean="0"/>
+              <a:rPr lang="en-US"/>
               <a:t>Second level</a:t>
             </a:r>
           </a:p>
           <a:p>
             <a:pPr lvl="2"/>
             <a:r>
-              <a:rPr lang="en-US" smtClean="0"/>
+              <a:rPr lang="en-US"/>
               <a:t>Third level</a:t>
             </a:r>
           </a:p>
           <a:p>
             <a:pPr lvl="3"/>
             <a:r>
-              <a:rPr lang="en-US" smtClean="0"/>
+              <a:rPr lang="en-US"/>
               <a:t>Fourth level</a:t>
             </a:r>
           </a:p>
           <a:p>
             <a:pPr lvl="4"/>
             <a:r>
-              <a:rPr lang="en-US" smtClean="0"/>
+              <a:rPr lang="en-US"/>
               <a:t>Fifth level</a:t>
             </a:r>
-            <a:endParaRPr lang="en-US"/>
           </a:p>
         </p:txBody>
       </p:sp>
@@ -1299,38 +3524,37 @@
           <a:p>
             <a:pPr lvl="0"/>
             <a:r>
-              <a:rPr lang="en-US" smtClean="0"/>
+              <a:rPr lang="en-US"/>
               <a:t>Click to edit Master text styles</a:t>
             </a:r>
           </a:p>
           <a:p>
             <a:pPr lvl="1"/>
             <a:r>
-              <a:rPr lang="en-US" smtClean="0"/>
+              <a:rPr lang="en-US"/>
               <a:t>Second level</a:t>
             </a:r>
           </a:p>
           <a:p>
             <a:pPr lvl="2"/>
             <a:r>
-              <a:rPr lang="en-US" smtClean="0"/>
+              <a:rPr lang="en-US"/>
               <a:t>Third level</a:t>
             </a:r>
           </a:p>
           <a:p>
             <a:pPr lvl="3"/>
             <a:r>
-              <a:rPr lang="en-US" smtClean="0"/>
+              <a:rPr lang="en-US"/>
               <a:t>Fourth level</a:t>
             </a:r>
           </a:p>
           <a:p>
             <a:pPr lvl="4"/>
             <a:r>
-              <a:rPr lang="en-US" smtClean="0"/>
+              <a:rPr lang="en-US"/>
               <a:t>Fifth level</a:t>
             </a:r>
-            <a:endParaRPr lang="en-US"/>
           </a:p>
         </p:txBody>
       </p:sp>
@@ -1351,7 +3575,7 @@
           <a:p>
             <a:fld id="{5BCAD085-E8A6-8845-BD4E-CB4CCA059FC4}" type="datetimeFigureOut">
               <a:rPr lang="en-US" smtClean="0"/>
-              <a:t>1/27/13</a:t>
+              <a:t>3/17/2026</a:t>
             </a:fld>
             <a:endParaRPr lang="en-US"/>
           </a:p>
@@ -1449,10 +3673,9 @@
           </a:lstStyle>
           <a:p>
             <a:r>
-              <a:rPr lang="en-US" smtClean="0"/>
+              <a:rPr lang="en-US"/>
               <a:t>Click to edit Master title style</a:t>
             </a:r>
-            <a:endParaRPr lang="en-US"/>
           </a:p>
         </p:txBody>
       </p:sp>
@@ -1515,7 +3738,7 @@
           <a:p>
             <a:pPr lvl="0"/>
             <a:r>
-              <a:rPr lang="en-US" smtClean="0"/>
+              <a:rPr lang="en-US"/>
               <a:t>Click to edit Master text styles</a:t>
             </a:r>
           </a:p>
@@ -1571,38 +3794,37 @@
           <a:p>
             <a:pPr lvl="0"/>
             <a:r>
-              <a:rPr lang="en-US" smtClean="0"/>
+              <a:rPr lang="en-US"/>
               <a:t>Click to edit Master text styles</a:t>
             </a:r>
           </a:p>
           <a:p>
             <a:pPr lvl="1"/>
             <a:r>
-              <a:rPr lang="en-US" smtClean="0"/>
+              <a:rPr lang="en-US"/>
               <a:t>Second level</a:t>
             </a:r>
           </a:p>
           <a:p>
             <a:pPr lvl="2"/>
             <a:r>
-              <a:rPr lang="en-US" smtClean="0"/>
+              <a:rPr lang="en-US"/>
               <a:t>Third level</a:t>
             </a:r>
           </a:p>
           <a:p>
             <a:pPr lvl="3"/>
             <a:r>
-              <a:rPr lang="en-US" smtClean="0"/>
+              <a:rPr lang="en-US"/>
               <a:t>Fourth level</a:t>
             </a:r>
           </a:p>
           <a:p>
             <a:pPr lvl="4"/>
             <a:r>
-              <a:rPr lang="en-US" smtClean="0"/>
+              <a:rPr lang="en-US"/>
               <a:t>Fifth level</a:t>
             </a:r>
-            <a:endParaRPr lang="en-US"/>
           </a:p>
         </p:txBody>
       </p:sp>
@@ -1665,7 +3887,7 @@
           <a:p>
             <a:pPr lvl="0"/>
             <a:r>
-              <a:rPr lang="en-US" smtClean="0"/>
+              <a:rPr lang="en-US"/>
               <a:t>Click to edit Master text styles</a:t>
             </a:r>
           </a:p>
@@ -1721,38 +3943,37 @@
           <a:p>
             <a:pPr lvl="0"/>
             <a:r>
-              <a:rPr lang="en-US" smtClean="0"/>
+              <a:rPr lang="en-US"/>
               <a:t>Click to edit Master text styles</a:t>
             </a:r>
           </a:p>
           <a:p>
             <a:pPr lvl="1"/>
             <a:r>
-              <a:rPr lang="en-US" smtClean="0"/>
+              <a:rPr lang="en-US"/>
               <a:t>Second level</a:t>
             </a:r>
           </a:p>
           <a:p>
             <a:pPr lvl="2"/>
             <a:r>
-              <a:rPr lang="en-US" smtClean="0"/>
+              <a:rPr lang="en-US"/>
               <a:t>Third level</a:t>
             </a:r>
           </a:p>
           <a:p>
             <a:pPr lvl="3"/>
             <a:r>
-              <a:rPr lang="en-US" smtClean="0"/>
+              <a:rPr lang="en-US"/>
               <a:t>Fourth level</a:t>
             </a:r>
           </a:p>
           <a:p>
             <a:pPr lvl="4"/>
             <a:r>
-              <a:rPr lang="en-US" smtClean="0"/>
+              <a:rPr lang="en-US"/>
               <a:t>Fifth level</a:t>
             </a:r>
-            <a:endParaRPr lang="en-US"/>
           </a:p>
         </p:txBody>
       </p:sp>
@@ -1773,7 +3994,7 @@
           <a:p>
             <a:fld id="{5BCAD085-E8A6-8845-BD4E-CB4CCA059FC4}" type="datetimeFigureOut">
               <a:rPr lang="en-US" smtClean="0"/>
-              <a:t>1/27/13</a:t>
+              <a:t>3/17/2026</a:t>
             </a:fld>
             <a:endParaRPr lang="en-US"/>
           </a:p>
@@ -1867,10 +4088,9 @@
           <a:lstStyle/>
           <a:p>
             <a:r>
-              <a:rPr lang="en-US" smtClean="0"/>
+              <a:rPr lang="en-US"/>
               <a:t>Click to edit Master title style</a:t>
             </a:r>
-            <a:endParaRPr lang="en-US"/>
           </a:p>
         </p:txBody>
       </p:sp>
@@ -1891,7 +4111,7 @@
           <a:p>
             <a:fld id="{5BCAD085-E8A6-8845-BD4E-CB4CCA059FC4}" type="datetimeFigureOut">
               <a:rPr lang="en-US" smtClean="0"/>
-              <a:t>1/27/13</a:t>
+              <a:t>3/17/2026</a:t>
             </a:fld>
             <a:endParaRPr lang="en-US"/>
           </a:p>
@@ -1986,7 +4206,7 @@
           <a:p>
             <a:fld id="{5BCAD085-E8A6-8845-BD4E-CB4CCA059FC4}" type="datetimeFigureOut">
               <a:rPr lang="en-US" smtClean="0"/>
-              <a:t>1/27/13</a:t>
+              <a:t>3/17/2026</a:t>
             </a:fld>
             <a:endParaRPr lang="en-US"/>
           </a:p>
@@ -2089,10 +4309,9 @@
           </a:lstStyle>
           <a:p>
             <a:r>
-              <a:rPr lang="en-US" smtClean="0"/>
+              <a:rPr lang="en-US"/>
               <a:t>Click to edit Master title style</a:t>
             </a:r>
-            <a:endParaRPr lang="en-US"/>
           </a:p>
         </p:txBody>
       </p:sp>
@@ -2146,38 +4365,37 @@
           <a:p>
             <a:pPr lvl="0"/>
             <a:r>
-              <a:rPr lang="en-US" smtClean="0"/>
+              <a:rPr lang="en-US"/>
               <a:t>Click to edit Master text styles</a:t>
             </a:r>
           </a:p>
           <a:p>
             <a:pPr lvl="1"/>
             <a:r>
-              <a:rPr lang="en-US" smtClean="0"/>
+              <a:rPr lang="en-US"/>
               <a:t>Second level</a:t>
             </a:r>
           </a:p>
           <a:p>
             <a:pPr lvl="2"/>
             <a:r>
-              <a:rPr lang="en-US" smtClean="0"/>
+              <a:rPr lang="en-US"/>
               <a:t>Third level</a:t>
             </a:r>
           </a:p>
           <a:p>
             <a:pPr lvl="3"/>
             <a:r>
-              <a:rPr lang="en-US" smtClean="0"/>
+              <a:rPr lang="en-US"/>
               <a:t>Fourth level</a:t>
             </a:r>
           </a:p>
           <a:p>
             <a:pPr lvl="4"/>
             <a:r>
-              <a:rPr lang="en-US" smtClean="0"/>
+              <a:rPr lang="en-US"/>
               <a:t>Fifth level</a:t>
             </a:r>
-            <a:endParaRPr lang="en-US"/>
           </a:p>
         </p:txBody>
       </p:sp>
@@ -2240,7 +4458,7 @@
           <a:p>
             <a:pPr lvl="0"/>
             <a:r>
-              <a:rPr lang="en-US" smtClean="0"/>
+              <a:rPr lang="en-US"/>
               <a:t>Click to edit Master text styles</a:t>
             </a:r>
           </a:p>
@@ -2263,7 +4481,7 @@
           <a:p>
             <a:fld id="{5BCAD085-E8A6-8845-BD4E-CB4CCA059FC4}" type="datetimeFigureOut">
               <a:rPr lang="en-US" smtClean="0"/>
-              <a:t>1/27/13</a:t>
+              <a:t>3/17/2026</a:t>
             </a:fld>
             <a:endParaRPr lang="en-US"/>
           </a:p>
@@ -2366,10 +4584,9 @@
           </a:lstStyle>
           <a:p>
             <a:r>
-              <a:rPr lang="en-US" smtClean="0"/>
+              <a:rPr lang="en-US"/>
               <a:t>Click to edit Master title style</a:t>
             </a:r>
-            <a:endParaRPr lang="en-US"/>
           </a:p>
         </p:txBody>
       </p:sp>
@@ -2493,7 +4710,7 @@
           <a:p>
             <a:pPr lvl="0"/>
             <a:r>
-              <a:rPr lang="en-US" smtClean="0"/>
+              <a:rPr lang="en-US"/>
               <a:t>Click to edit Master text styles</a:t>
             </a:r>
           </a:p>
@@ -2516,7 +4733,7 @@
           <a:p>
             <a:fld id="{5BCAD085-E8A6-8845-BD4E-CB4CCA059FC4}" type="datetimeFigureOut">
               <a:rPr lang="en-US" smtClean="0"/>
-              <a:t>1/27/13</a:t>
+              <a:t>3/17/2026</a:t>
             </a:fld>
             <a:endParaRPr lang="en-US"/>
           </a:p>
@@ -2625,10 +4842,9 @@
           <a:lstStyle/>
           <a:p>
             <a:r>
-              <a:rPr lang="en-US" smtClean="0"/>
+              <a:rPr lang="en-US"/>
               <a:t>Click to edit Master title style</a:t>
             </a:r>
-            <a:endParaRPr lang="en-US"/>
           </a:p>
         </p:txBody>
       </p:sp>
@@ -2659,38 +4875,37 @@
           <a:p>
             <a:pPr lvl="0"/>
             <a:r>
-              <a:rPr lang="en-US" smtClean="0"/>
+              <a:rPr lang="en-US"/>
               <a:t>Click to edit Master text styles</a:t>
             </a:r>
           </a:p>
           <a:p>
             <a:pPr lvl="1"/>
             <a:r>
-              <a:rPr lang="en-US" smtClean="0"/>
+              <a:rPr lang="en-US"/>
               <a:t>Second level</a:t>
             </a:r>
           </a:p>
           <a:p>
             <a:pPr lvl="2"/>
             <a:r>
-              <a:rPr lang="en-US" smtClean="0"/>
+              <a:rPr lang="en-US"/>
               <a:t>Third level</a:t>
             </a:r>
           </a:p>
           <a:p>
             <a:pPr lvl="3"/>
             <a:r>
-              <a:rPr lang="en-US" smtClean="0"/>
+              <a:rPr lang="en-US"/>
               <a:t>Fourth level</a:t>
             </a:r>
           </a:p>
           <a:p>
             <a:pPr lvl="4"/>
             <a:r>
-              <a:rPr lang="en-US" smtClean="0"/>
+              <a:rPr lang="en-US"/>
               <a:t>Fifth level</a:t>
             </a:r>
-            <a:endParaRPr lang="en-US"/>
           </a:p>
         </p:txBody>
       </p:sp>
@@ -2729,7 +4944,7 @@
           <a:p>
             <a:fld id="{5BCAD085-E8A6-8845-BD4E-CB4CCA059FC4}" type="datetimeFigureOut">
               <a:rPr lang="en-US" smtClean="0"/>
-              <a:t>1/27/13</a:t>
+              <a:t>3/17/2026</a:t>
             </a:fld>
             <a:endParaRPr lang="en-US"/>
           </a:p>
@@ -3088,7 +5303,7 @@
 </file>
 
 <file path=ppt/slides/slide1.xml><?xml version="1.0" encoding="utf-8"?>
-<p:sld xmlns:a="http://schemas.openxmlformats.org/drawingml/2006/main" xmlns:p="http://schemas.openxmlformats.org/presentationml/2006/main" xmlns:r="http://schemas.openxmlformats.org/officeDocument/2006/relationships">
+<p:sld xmlns:a="http://schemas.openxmlformats.org/drawingml/2006/main" xmlns:r="http://schemas.openxmlformats.org/officeDocument/2006/relationships" xmlns:p="http://schemas.openxmlformats.org/presentationml/2006/main">
   <p:cSld>
     <p:spTree>
       <p:nvGrpSpPr>
@@ -3096,7 +5311,14 @@
         <p:cNvGrpSpPr/>
         <p:nvPr/>
       </p:nvGrpSpPr>
-      <p:grpSpPr/>
+      <p:grpSpPr>
+        <a:xfrm>
+          <a:off x="0" y="0"/>
+          <a:ext cx="0" cy="0"/>
+          <a:chOff x="0" y="0"/>
+          <a:chExt cx="0" cy="0"/>
+        </a:xfrm>
+      </p:grpSpPr>
       <p:pic>
         <p:nvPicPr>
           <p:cNvPr id="2" name="Picture 1" descr="slide_01.png"/>
@@ -3106,7 +5328,7 @@
           <p:nvPr/>
         </p:nvPicPr>
         <p:blipFill>
-          <a:blip r:embed="rId2"/>
+          <a:blip r:embed="rId3"/>
           <a:stretch>
             <a:fillRect/>
           </a:stretch>
@@ -3123,17 +5345,17 @@
       </p:pic>
     </p:spTree>
   </p:cSld>
-  <p:transition spd="med" advClick="1">
-    <p:fade/>
-  </p:transition>
   <p:clrMapOvr>
     <a:masterClrMapping/>
   </p:clrMapOvr>
+  <p:transition spd="med">
+    <p:fade/>
+  </p:transition>
 </p:sld>
 </file>
 
 <file path=ppt/slides/slide10.xml><?xml version="1.0" encoding="utf-8"?>
-<p:sld xmlns:a="http://schemas.openxmlformats.org/drawingml/2006/main" xmlns:p="http://schemas.openxmlformats.org/presentationml/2006/main" xmlns:r="http://schemas.openxmlformats.org/officeDocument/2006/relationships">
+<p:sld xmlns:a="http://schemas.openxmlformats.org/drawingml/2006/main" xmlns:r="http://schemas.openxmlformats.org/officeDocument/2006/relationships" xmlns:p="http://schemas.openxmlformats.org/presentationml/2006/main">
   <p:cSld>
     <p:spTree>
       <p:nvGrpSpPr>
@@ -3141,7 +5363,14 @@
         <p:cNvGrpSpPr/>
         <p:nvPr/>
       </p:nvGrpSpPr>
-      <p:grpSpPr/>
+      <p:grpSpPr>
+        <a:xfrm>
+          <a:off x="0" y="0"/>
+          <a:ext cx="0" cy="0"/>
+          <a:chOff x="0" y="0"/>
+          <a:chExt cx="0" cy="0"/>
+        </a:xfrm>
+      </p:grpSpPr>
       <p:pic>
         <p:nvPicPr>
           <p:cNvPr id="2" name="Picture 1" descr="slide_10.png"/>
@@ -3151,7 +5380,7 @@
           <p:nvPr/>
         </p:nvPicPr>
         <p:blipFill>
-          <a:blip r:embed="rId2"/>
+          <a:blip r:embed="rId3"/>
           <a:stretch>
             <a:fillRect/>
           </a:stretch>
@@ -3168,17 +5397,17 @@
       </p:pic>
     </p:spTree>
   </p:cSld>
-  <p:transition spd="med" advClick="1">
-    <p:fade/>
-  </p:transition>
   <p:clrMapOvr>
     <a:masterClrMapping/>
   </p:clrMapOvr>
+  <p:transition spd="med">
+    <p:fade/>
+  </p:transition>
 </p:sld>
 </file>
 
 <file path=ppt/slides/slide2.xml><?xml version="1.0" encoding="utf-8"?>
-<p:sld xmlns:a="http://schemas.openxmlformats.org/drawingml/2006/main" xmlns:p="http://schemas.openxmlformats.org/presentationml/2006/main" xmlns:r="http://schemas.openxmlformats.org/officeDocument/2006/relationships">
+<p:sld xmlns:a="http://schemas.openxmlformats.org/drawingml/2006/main" xmlns:r="http://schemas.openxmlformats.org/officeDocument/2006/relationships" xmlns:p="http://schemas.openxmlformats.org/presentationml/2006/main">
   <p:cSld>
     <p:spTree>
       <p:nvGrpSpPr>
@@ -3186,7 +5415,14 @@
         <p:cNvGrpSpPr/>
         <p:nvPr/>
       </p:nvGrpSpPr>
-      <p:grpSpPr/>
+      <p:grpSpPr>
+        <a:xfrm>
+          <a:off x="0" y="0"/>
+          <a:ext cx="0" cy="0"/>
+          <a:chOff x="0" y="0"/>
+          <a:chExt cx="0" cy="0"/>
+        </a:xfrm>
+      </p:grpSpPr>
       <p:pic>
         <p:nvPicPr>
           <p:cNvPr id="2" name="Picture 1" descr="slide_02.png"/>
@@ -3196,7 +5432,7 @@
           <p:nvPr/>
         </p:nvPicPr>
         <p:blipFill>
-          <a:blip r:embed="rId2"/>
+          <a:blip r:embed="rId3"/>
           <a:stretch>
             <a:fillRect/>
           </a:stretch>
@@ -3213,17 +5449,17 @@
       </p:pic>
     </p:spTree>
   </p:cSld>
-  <p:transition spd="med" advClick="1">
-    <p:fade/>
-  </p:transition>
   <p:clrMapOvr>
     <a:masterClrMapping/>
   </p:clrMapOvr>
+  <p:transition spd="med">
+    <p:fade/>
+  </p:transition>
 </p:sld>
 </file>
 
 <file path=ppt/slides/slide3.xml><?xml version="1.0" encoding="utf-8"?>
-<p:sld xmlns:a="http://schemas.openxmlformats.org/drawingml/2006/main" xmlns:p="http://schemas.openxmlformats.org/presentationml/2006/main" xmlns:r="http://schemas.openxmlformats.org/officeDocument/2006/relationships">
+<p:sld xmlns:a="http://schemas.openxmlformats.org/drawingml/2006/main" xmlns:r="http://schemas.openxmlformats.org/officeDocument/2006/relationships" xmlns:p="http://schemas.openxmlformats.org/presentationml/2006/main">
   <p:cSld>
     <p:spTree>
       <p:nvGrpSpPr>
@@ -3231,7 +5467,14 @@
         <p:cNvGrpSpPr/>
         <p:nvPr/>
       </p:nvGrpSpPr>
-      <p:grpSpPr/>
+      <p:grpSpPr>
+        <a:xfrm>
+          <a:off x="0" y="0"/>
+          <a:ext cx="0" cy="0"/>
+          <a:chOff x="0" y="0"/>
+          <a:chExt cx="0" cy="0"/>
+        </a:xfrm>
+      </p:grpSpPr>
       <p:pic>
         <p:nvPicPr>
           <p:cNvPr id="2" name="Picture 1" descr="slide_03.png"/>
@@ -3241,7 +5484,7 @@
           <p:nvPr/>
         </p:nvPicPr>
         <p:blipFill>
-          <a:blip r:embed="rId2"/>
+          <a:blip r:embed="rId3"/>
           <a:stretch>
             <a:fillRect/>
           </a:stretch>
@@ -3258,17 +5501,17 @@
       </p:pic>
     </p:spTree>
   </p:cSld>
-  <p:transition spd="med" advClick="1">
-    <p:fade/>
-  </p:transition>
   <p:clrMapOvr>
     <a:masterClrMapping/>
   </p:clrMapOvr>
+  <p:transition spd="med">
+    <p:fade/>
+  </p:transition>
 </p:sld>
 </file>
 
 <file path=ppt/slides/slide4.xml><?xml version="1.0" encoding="utf-8"?>
-<p:sld xmlns:a="http://schemas.openxmlformats.org/drawingml/2006/main" xmlns:p="http://schemas.openxmlformats.org/presentationml/2006/main" xmlns:r="http://schemas.openxmlformats.org/officeDocument/2006/relationships">
+<p:sld xmlns:a="http://schemas.openxmlformats.org/drawingml/2006/main" xmlns:r="http://schemas.openxmlformats.org/officeDocument/2006/relationships" xmlns:p="http://schemas.openxmlformats.org/presentationml/2006/main">
   <p:cSld>
     <p:spTree>
       <p:nvGrpSpPr>
@@ -3276,7 +5519,14 @@
         <p:cNvGrpSpPr/>
         <p:nvPr/>
       </p:nvGrpSpPr>
-      <p:grpSpPr/>
+      <p:grpSpPr>
+        <a:xfrm>
+          <a:off x="0" y="0"/>
+          <a:ext cx="0" cy="0"/>
+          <a:chOff x="0" y="0"/>
+          <a:chExt cx="0" cy="0"/>
+        </a:xfrm>
+      </p:grpSpPr>
       <p:pic>
         <p:nvPicPr>
           <p:cNvPr id="2" name="Picture 1" descr="slide_04.png"/>
@@ -3286,7 +5536,109 @@
           <p:nvPr/>
         </p:nvPicPr>
         <p:blipFill>
-          <a:blip r:embed="rId2"/>
+          <a:blip r:embed="rId3"/>
+          <a:stretch>
+            <a:fillRect/>
+          </a:stretch>
+        </p:blipFill>
+        <p:spPr>
+          <a:xfrm>
+            <a:off x="0" y="0"/>
+            <a:ext cx="12192000" cy="6858000"/>
+          </a:xfrm>
+          <a:prstGeom prst="rect">
+            <a:avLst/>
+          </a:prstGeom>
+        </p:spPr>
+      </p:pic>
+      <p:sp>
+        <p:nvSpPr>
+          <p:cNvPr id="3" name="Rectangle 2">
+            <a:extLst>
+              <a:ext uri="{FF2B5EF4-FFF2-40B4-BE49-F238E27FC236}">
+                <a16:creationId xmlns:a16="http://schemas.microsoft.com/office/drawing/2014/main" id="{4F9D48A3-4DFB-A53B-959E-88E66EDFDC5B}"/>
+              </a:ext>
+            </a:extLst>
+          </p:cNvPr>
+          <p:cNvSpPr/>
+          <p:nvPr/>
+        </p:nvSpPr>
+        <p:spPr>
+          <a:xfrm>
+            <a:off x="4745421" y="1665889"/>
+            <a:ext cx="1350579" cy="357351"/>
+          </a:xfrm>
+          <a:prstGeom prst="rect">
+            <a:avLst/>
+          </a:prstGeom>
+          <a:solidFill>
+            <a:schemeClr val="bg1"/>
+          </a:solidFill>
+          <a:ln>
+            <a:noFill/>
+          </a:ln>
+        </p:spPr>
+        <p:style>
+          <a:lnRef idx="2">
+            <a:schemeClr val="dk1"/>
+          </a:lnRef>
+          <a:fillRef idx="1">
+            <a:schemeClr val="lt1"/>
+          </a:fillRef>
+          <a:effectRef idx="0">
+            <a:schemeClr val="dk1"/>
+          </a:effectRef>
+          <a:fontRef idx="minor">
+            <a:schemeClr val="dk1"/>
+          </a:fontRef>
+        </p:style>
+        <p:txBody>
+          <a:bodyPr rtlCol="0" anchor="ctr"/>
+          <a:lstStyle/>
+          <a:p>
+            <a:pPr algn="ctr"/>
+            <a:endParaRPr lang="en-US" dirty="0"/>
+          </a:p>
+        </p:txBody>
+      </p:sp>
+    </p:spTree>
+  </p:cSld>
+  <p:clrMapOvr>
+    <a:masterClrMapping/>
+  </p:clrMapOvr>
+  <p:transition spd="med">
+    <p:fade/>
+  </p:transition>
+</p:sld>
+</file>
+
+<file path=ppt/slides/slide5.xml><?xml version="1.0" encoding="utf-8"?>
+<p:sld xmlns:a="http://schemas.openxmlformats.org/drawingml/2006/main" xmlns:r="http://schemas.openxmlformats.org/officeDocument/2006/relationships" xmlns:p="http://schemas.openxmlformats.org/presentationml/2006/main">
+  <p:cSld>
+    <p:spTree>
+      <p:nvGrpSpPr>
+        <p:cNvPr id="1" name=""/>
+        <p:cNvGrpSpPr/>
+        <p:nvPr/>
+      </p:nvGrpSpPr>
+      <p:grpSpPr>
+        <a:xfrm>
+          <a:off x="0" y="0"/>
+          <a:ext cx="0" cy="0"/>
+          <a:chOff x="0" y="0"/>
+          <a:chExt cx="0" cy="0"/>
+        </a:xfrm>
+      </p:grpSpPr>
+      <p:pic>
+        <p:nvPicPr>
+          <p:cNvPr id="2" name="Picture 1" descr="slide_05.png"/>
+          <p:cNvPicPr>
+            <a:picLocks noChangeAspect="1"/>
+          </p:cNvPicPr>
+          <p:nvPr/>
+        </p:nvPicPr>
+        <p:blipFill>
+          <a:blip r:embed="rId3"/>
           <a:stretch>
             <a:fillRect/>
           </a:stretch>
@@ -3303,17 +5655,17 @@
       </p:pic>
     </p:spTree>
   </p:cSld>
-  <p:transition spd="med" advClick="1">
-    <p:fade/>
-  </p:transition>
   <p:clrMapOvr>
     <a:masterClrMapping/>
   </p:clrMapOvr>
+  <p:transition spd="med">
+    <p:fade/>
+  </p:transition>
 </p:sld>
 </file>
 
-<file path=ppt/slides/slide5.xml><?xml version="1.0" encoding="utf-8"?>
-<p:sld xmlns:a="http://schemas.openxmlformats.org/drawingml/2006/main" xmlns:p="http://schemas.openxmlformats.org/presentationml/2006/main" xmlns:r="http://schemas.openxmlformats.org/officeDocument/2006/relationships">
+<file path=ppt/slides/slide6.xml><?xml version="1.0" encoding="utf-8"?>
+<p:sld xmlns:a="http://schemas.openxmlformats.org/drawingml/2006/main" xmlns:r="http://schemas.openxmlformats.org/officeDocument/2006/relationships" xmlns:p="http://schemas.openxmlformats.org/presentationml/2006/main">
   <p:cSld>
     <p:spTree>
       <p:nvGrpSpPr>
@@ -3321,17 +5673,24 @@
         <p:cNvGrpSpPr/>
         <p:nvPr/>
       </p:nvGrpSpPr>
-      <p:grpSpPr/>
+      <p:grpSpPr>
+        <a:xfrm>
+          <a:off x="0" y="0"/>
+          <a:ext cx="0" cy="0"/>
+          <a:chOff x="0" y="0"/>
+          <a:chExt cx="0" cy="0"/>
+        </a:xfrm>
+      </p:grpSpPr>
       <p:pic>
         <p:nvPicPr>
-          <p:cNvPr id="2" name="Picture 1" descr="slide_05.png"/>
+          <p:cNvPr id="2" name="Picture 1" descr="slide_06.png"/>
           <p:cNvPicPr>
             <a:picLocks noChangeAspect="1"/>
           </p:cNvPicPr>
           <p:nvPr/>
         </p:nvPicPr>
         <p:blipFill>
-          <a:blip r:embed="rId2"/>
+          <a:blip r:embed="rId3"/>
           <a:stretch>
             <a:fillRect/>
           </a:stretch>
@@ -3348,17 +5707,17 @@
       </p:pic>
     </p:spTree>
   </p:cSld>
-  <p:transition spd="med" advClick="1">
-    <p:fade/>
-  </p:transition>
   <p:clrMapOvr>
     <a:masterClrMapping/>
   </p:clrMapOvr>
+  <p:transition spd="med">
+    <p:fade/>
+  </p:transition>
 </p:sld>
 </file>
 
-<file path=ppt/slides/slide6.xml><?xml version="1.0" encoding="utf-8"?>
-<p:sld xmlns:a="http://schemas.openxmlformats.org/drawingml/2006/main" xmlns:p="http://schemas.openxmlformats.org/presentationml/2006/main" xmlns:r="http://schemas.openxmlformats.org/officeDocument/2006/relationships">
+<file path=ppt/slides/slide7.xml><?xml version="1.0" encoding="utf-8"?>
+<p:sld xmlns:a="http://schemas.openxmlformats.org/drawingml/2006/main" xmlns:r="http://schemas.openxmlformats.org/officeDocument/2006/relationships" xmlns:p="http://schemas.openxmlformats.org/presentationml/2006/main">
   <p:cSld>
     <p:spTree>
       <p:nvGrpSpPr>
@@ -3366,17 +5725,24 @@
         <p:cNvGrpSpPr/>
         <p:nvPr/>
       </p:nvGrpSpPr>
-      <p:grpSpPr/>
+      <p:grpSpPr>
+        <a:xfrm>
+          <a:off x="0" y="0"/>
+          <a:ext cx="0" cy="0"/>
+          <a:chOff x="0" y="0"/>
+          <a:chExt cx="0" cy="0"/>
+        </a:xfrm>
+      </p:grpSpPr>
       <p:pic>
         <p:nvPicPr>
-          <p:cNvPr id="2" name="Picture 1" descr="slide_06.png"/>
+          <p:cNvPr id="2" name="Picture 1" descr="slide_07.png"/>
           <p:cNvPicPr>
             <a:picLocks noChangeAspect="1"/>
           </p:cNvPicPr>
           <p:nvPr/>
         </p:nvPicPr>
         <p:blipFill>
-          <a:blip r:embed="rId2"/>
+          <a:blip r:embed="rId3"/>
           <a:stretch>
             <a:fillRect/>
           </a:stretch>
@@ -3393,17 +5759,17 @@
       </p:pic>
     </p:spTree>
   </p:cSld>
-  <p:transition spd="med" advClick="1">
-    <p:fade/>
-  </p:transition>
   <p:clrMapOvr>
     <a:masterClrMapping/>
   </p:clrMapOvr>
+  <p:transition spd="med">
+    <p:fade/>
+  </p:transition>
 </p:sld>
 </file>
 
-<file path=ppt/slides/slide7.xml><?xml version="1.0" encoding="utf-8"?>
-<p:sld xmlns:a="http://schemas.openxmlformats.org/drawingml/2006/main" xmlns:p="http://schemas.openxmlformats.org/presentationml/2006/main" xmlns:r="http://schemas.openxmlformats.org/officeDocument/2006/relationships">
+<file path=ppt/slides/slide8.xml><?xml version="1.0" encoding="utf-8"?>
+<p:sld xmlns:a="http://schemas.openxmlformats.org/drawingml/2006/main" xmlns:r="http://schemas.openxmlformats.org/officeDocument/2006/relationships" xmlns:p="http://schemas.openxmlformats.org/presentationml/2006/main">
   <p:cSld>
     <p:spTree>
       <p:nvGrpSpPr>
@@ -3411,17 +5777,24 @@
         <p:cNvGrpSpPr/>
         <p:nvPr/>
       </p:nvGrpSpPr>
-      <p:grpSpPr/>
+      <p:grpSpPr>
+        <a:xfrm>
+          <a:off x="0" y="0"/>
+          <a:ext cx="0" cy="0"/>
+          <a:chOff x="0" y="0"/>
+          <a:chExt cx="0" cy="0"/>
+        </a:xfrm>
+      </p:grpSpPr>
       <p:pic>
         <p:nvPicPr>
-          <p:cNvPr id="2" name="Picture 1" descr="slide_07.png"/>
+          <p:cNvPr id="2" name="Picture 1" descr="slide_08.png"/>
           <p:cNvPicPr>
             <a:picLocks noChangeAspect="1"/>
           </p:cNvPicPr>
           <p:nvPr/>
         </p:nvPicPr>
         <p:blipFill>
-          <a:blip r:embed="rId2"/>
+          <a:blip r:embed="rId3"/>
           <a:stretch>
             <a:fillRect/>
           </a:stretch>
@@ -3438,17 +5811,17 @@
       </p:pic>
     </p:spTree>
   </p:cSld>
-  <p:transition spd="med" advClick="1">
-    <p:fade/>
-  </p:transition>
   <p:clrMapOvr>
     <a:masterClrMapping/>
   </p:clrMapOvr>
+  <p:transition spd="med">
+    <p:fade/>
+  </p:transition>
 </p:sld>
 </file>
 
-<file path=ppt/slides/slide8.xml><?xml version="1.0" encoding="utf-8"?>
-<p:sld xmlns:a="http://schemas.openxmlformats.org/drawingml/2006/main" xmlns:p="http://schemas.openxmlformats.org/presentationml/2006/main" xmlns:r="http://schemas.openxmlformats.org/officeDocument/2006/relationships">
+<file path=ppt/slides/slide9.xml><?xml version="1.0" encoding="utf-8"?>
+<p:sld xmlns:a="http://schemas.openxmlformats.org/drawingml/2006/main" xmlns:r="http://schemas.openxmlformats.org/officeDocument/2006/relationships" xmlns:p="http://schemas.openxmlformats.org/presentationml/2006/main">
   <p:cSld>
     <p:spTree>
       <p:nvGrpSpPr>
@@ -3456,17 +5829,24 @@
         <p:cNvGrpSpPr/>
         <p:nvPr/>
       </p:nvGrpSpPr>
-      <p:grpSpPr/>
+      <p:grpSpPr>
+        <a:xfrm>
+          <a:off x="0" y="0"/>
+          <a:ext cx="0" cy="0"/>
+          <a:chOff x="0" y="0"/>
+          <a:chExt cx="0" cy="0"/>
+        </a:xfrm>
+      </p:grpSpPr>
       <p:pic>
         <p:nvPicPr>
-          <p:cNvPr id="2" name="Picture 1" descr="slide_08.png"/>
+          <p:cNvPr id="2" name="Picture 1" descr="slide_09.png"/>
           <p:cNvPicPr>
             <a:picLocks noChangeAspect="1"/>
           </p:cNvPicPr>
           <p:nvPr/>
         </p:nvPicPr>
         <p:blipFill>
-          <a:blip r:embed="rId2"/>
+          <a:blip r:embed="rId3"/>
           <a:stretch>
             <a:fillRect/>
           </a:stretch>
@@ -3483,57 +5863,12 @@
       </p:pic>
     </p:spTree>
   </p:cSld>
-  <p:transition spd="med" advClick="1">
-    <p:fade/>
-  </p:transition>
   <p:clrMapOvr>
     <a:masterClrMapping/>
   </p:clrMapOvr>
-</p:sld>
-</file>
-
-<file path=ppt/slides/slide9.xml><?xml version="1.0" encoding="utf-8"?>
-<p:sld xmlns:a="http://schemas.openxmlformats.org/drawingml/2006/main" xmlns:p="http://schemas.openxmlformats.org/presentationml/2006/main" xmlns:r="http://schemas.openxmlformats.org/officeDocument/2006/relationships">
-  <p:cSld>
-    <p:spTree>
-      <p:nvGrpSpPr>
-        <p:cNvPr id="1" name=""/>
-        <p:cNvGrpSpPr/>
-        <p:nvPr/>
-      </p:nvGrpSpPr>
-      <p:grpSpPr/>
-      <p:pic>
-        <p:nvPicPr>
-          <p:cNvPr id="2" name="Picture 1" descr="slide_09.png"/>
-          <p:cNvPicPr>
-            <a:picLocks noChangeAspect="1"/>
-          </p:cNvPicPr>
-          <p:nvPr/>
-        </p:nvPicPr>
-        <p:blipFill>
-          <a:blip r:embed="rId2"/>
-          <a:stretch>
-            <a:fillRect/>
-          </a:stretch>
-        </p:blipFill>
-        <p:spPr>
-          <a:xfrm>
-            <a:off x="0" y="0"/>
-            <a:ext cx="12192000" cy="6858000"/>
-          </a:xfrm>
-          <a:prstGeom prst="rect">
-            <a:avLst/>
-          </a:prstGeom>
-        </p:spPr>
-      </p:pic>
-    </p:spTree>
-  </p:cSld>
-  <p:transition spd="med" advClick="1">
+  <p:transition spd="med">
     <p:fade/>
   </p:transition>
-  <p:clrMapOvr>
-    <a:masterClrMapping/>
-  </p:clrMapOvr>
 </p:sld>
 </file>
 
@@ -3855,4 +6190,319 @@
   </a:objectDefaults>
   <a:extraClrSchemeLst/>
 </a:theme>
+</file>
+
+<file path=ppt/theme/theme2.xml><?xml version="1.0" encoding="utf-8"?>
+<a:theme xmlns:a="http://schemas.openxmlformats.org/drawingml/2006/main" name="Office Theme">
+  <a:themeElements>
+    <a:clrScheme name="Office">
+      <a:dk1>
+        <a:sysClr val="windowText" lastClr="000000"/>
+      </a:dk1>
+      <a:lt1>
+        <a:sysClr val="window" lastClr="FFFFFF"/>
+      </a:lt1>
+      <a:dk2>
+        <a:srgbClr val="0E2841"/>
+      </a:dk2>
+      <a:lt2>
+        <a:srgbClr val="E8E8E8"/>
+      </a:lt2>
+      <a:accent1>
+        <a:srgbClr val="156082"/>
+      </a:accent1>
+      <a:accent2>
+        <a:srgbClr val="E97132"/>
+      </a:accent2>
+      <a:accent3>
+        <a:srgbClr val="196B24"/>
+      </a:accent3>
+      <a:accent4>
+        <a:srgbClr val="0F9ED5"/>
+      </a:accent4>
+      <a:accent5>
+        <a:srgbClr val="A02B93"/>
+      </a:accent5>
+      <a:accent6>
+        <a:srgbClr val="4EA72E"/>
+      </a:accent6>
+      <a:hlink>
+        <a:srgbClr val="467886"/>
+      </a:hlink>
+      <a:folHlink>
+        <a:srgbClr val="96607D"/>
+      </a:folHlink>
+    </a:clrScheme>
+    <a:fontScheme name="Office">
+      <a:majorFont>
+        <a:latin typeface="Aptos Display" panose="02110004020202020204"/>
+        <a:ea typeface=""/>
+        <a:cs typeface=""/>
+        <a:font script="Jpan" typeface="游ゴシック Light"/>
+        <a:font script="Hang" typeface="맑은 고딕"/>
+        <a:font script="Hans" typeface="等线 Light"/>
+        <a:font script="Hant" typeface="新細明體"/>
+        <a:font script="Arab" typeface="Times New Roman"/>
+        <a:font script="Hebr" typeface="Times New Roman"/>
+        <a:font script="Thai" typeface="Angsana New"/>
+        <a:font script="Ethi" typeface="Nyala"/>
+        <a:font script="Beng" typeface="Vrinda"/>
+        <a:font script="Gujr" typeface="Shruti"/>
+        <a:font script="Khmr" typeface="MoolBoran"/>
+        <a:font script="Knda" typeface="Tunga"/>
+        <a:font script="Guru" typeface="Raavi"/>
+        <a:font script="Cans" typeface="Euphemia"/>
+        <a:font script="Cher" typeface="Plantagenet Cherokee"/>
+        <a:font script="Yiii" typeface="Microsoft Yi Baiti"/>
+        <a:font script="Tibt" typeface="Microsoft Himalaya"/>
+        <a:font script="Thaa" typeface="MV Boli"/>
+        <a:font script="Deva" typeface="Mangal"/>
+        <a:font script="Telu" typeface="Gautami"/>
+        <a:font script="Taml" typeface="Latha"/>
+        <a:font script="Syrc" typeface="Estrangelo Edessa"/>
+        <a:font script="Orya" typeface="Kalinga"/>
+        <a:font script="Mlym" typeface="Kartika"/>
+        <a:font script="Laoo" typeface="DokChampa"/>
+        <a:font script="Sinh" typeface="Iskoola Pota"/>
+        <a:font script="Mong" typeface="Mongolian Baiti"/>
+        <a:font script="Viet" typeface="Times New Roman"/>
+        <a:font script="Uigh" typeface="Microsoft Uighur"/>
+        <a:font script="Geor" typeface="Sylfaen"/>
+        <a:font script="Armn" typeface="Arial"/>
+        <a:font script="Bugi" typeface="Leelawadee UI"/>
+        <a:font script="Bopo" typeface="Microsoft JhengHei"/>
+        <a:font script="Java" typeface="Javanese Text"/>
+        <a:font script="Lisu" typeface="Segoe UI"/>
+        <a:font script="Mymr" typeface="Myanmar Text"/>
+        <a:font script="Nkoo" typeface="Ebrima"/>
+        <a:font script="Olck" typeface="Nirmala UI"/>
+        <a:font script="Osma" typeface="Ebrima"/>
+        <a:font script="Phag" typeface="Phagspa"/>
+        <a:font script="Syrn" typeface="Estrangelo Edessa"/>
+        <a:font script="Syrj" typeface="Estrangelo Edessa"/>
+        <a:font script="Syre" typeface="Estrangelo Edessa"/>
+        <a:font script="Sora" typeface="Nirmala UI"/>
+        <a:font script="Tale" typeface="Microsoft Tai Le"/>
+        <a:font script="Talu" typeface="Microsoft New Tai Lue"/>
+        <a:font script="Tfng" typeface="Ebrima"/>
+      </a:majorFont>
+      <a:minorFont>
+        <a:latin typeface="Aptos" panose="02110004020202020204"/>
+        <a:ea typeface=""/>
+        <a:cs typeface=""/>
+        <a:font script="Jpan" typeface="游ゴシック"/>
+        <a:font script="Hang" typeface="맑은 고딕"/>
+        <a:font script="Hans" typeface="等线"/>
+        <a:font script="Hant" typeface="新細明體"/>
+        <a:font script="Arab" typeface="Arial"/>
+        <a:font script="Hebr" typeface="Arial"/>
+        <a:font script="Thai" typeface="Cordia New"/>
+        <a:font script="Ethi" typeface="Nyala"/>
+        <a:font script="Beng" typeface="Vrinda"/>
+        <a:font script="Gujr" typeface="Shruti"/>
+        <a:font script="Khmr" typeface="DaunPenh"/>
+        <a:font script="Knda" typeface="Tunga"/>
+        <a:font script="Guru" typeface="Raavi"/>
+        <a:font script="Cans" typeface="Euphemia"/>
+        <a:font script="Cher" typeface="Plantagenet Cherokee"/>
+        <a:font script="Yiii" typeface="Microsoft Yi Baiti"/>
+        <a:font script="Tibt" typeface="Microsoft Himalaya"/>
+        <a:font script="Thaa" typeface="MV Boli"/>
+        <a:font script="Deva" typeface="Mangal"/>
+        <a:font script="Telu" typeface="Gautami"/>
+        <a:font script="Taml" typeface="Latha"/>
+        <a:font script="Syrc" typeface="Estrangelo Edessa"/>
+        <a:font script="Orya" typeface="Kalinga"/>
+        <a:font script="Mlym" typeface="Kartika"/>
+        <a:font script="Laoo" typeface="DokChampa"/>
+        <a:font script="Sinh" typeface="Iskoola Pota"/>
+        <a:font script="Mong" typeface="Mongolian Baiti"/>
+        <a:font script="Viet" typeface="Arial"/>
+        <a:font script="Uigh" typeface="Microsoft Uighur"/>
+        <a:font script="Geor" typeface="Sylfaen"/>
+        <a:font script="Armn" typeface="Arial"/>
+        <a:font script="Bugi" typeface="Leelawadee UI"/>
+        <a:font script="Bopo" typeface="Microsoft JhengHei"/>
+        <a:font script="Java" typeface="Javanese Text"/>
+        <a:font script="Lisu" typeface="Segoe UI"/>
+        <a:font script="Mymr" typeface="Myanmar Text"/>
+        <a:font script="Nkoo" typeface="Ebrima"/>
+        <a:font script="Olck" typeface="Nirmala UI"/>
+        <a:font script="Osma" typeface="Ebrima"/>
+        <a:font script="Phag" typeface="Phagspa"/>
+        <a:font script="Syrn" typeface="Estrangelo Edessa"/>
+        <a:font script="Syrj" typeface="Estrangelo Edessa"/>
+        <a:font script="Syre" typeface="Estrangelo Edessa"/>
+        <a:font script="Sora" typeface="Nirmala UI"/>
+        <a:font script="Tale" typeface="Microsoft Tai Le"/>
+        <a:font script="Talu" typeface="Microsoft New Tai Lue"/>
+        <a:font script="Tfng" typeface="Ebrima"/>
+      </a:minorFont>
+    </a:fontScheme>
+    <a:fmtScheme name="Office">
+      <a:fillStyleLst>
+        <a:solidFill>
+          <a:schemeClr val="phClr"/>
+        </a:solidFill>
+        <a:gradFill rotWithShape="1">
+          <a:gsLst>
+            <a:gs pos="0">
+              <a:schemeClr val="phClr">
+                <a:lumMod val="110000"/>
+                <a:satMod val="105000"/>
+                <a:tint val="67000"/>
+              </a:schemeClr>
+            </a:gs>
+            <a:gs pos="50000">
+              <a:schemeClr val="phClr">
+                <a:lumMod val="105000"/>
+                <a:satMod val="103000"/>
+                <a:tint val="73000"/>
+              </a:schemeClr>
+            </a:gs>
+            <a:gs pos="100000">
+              <a:schemeClr val="phClr">
+                <a:lumMod val="105000"/>
+                <a:satMod val="109000"/>
+                <a:tint val="81000"/>
+              </a:schemeClr>
+            </a:gs>
+          </a:gsLst>
+          <a:lin ang="5400000" scaled="0"/>
+        </a:gradFill>
+        <a:gradFill rotWithShape="1">
+          <a:gsLst>
+            <a:gs pos="0">
+              <a:schemeClr val="phClr">
+                <a:satMod val="103000"/>
+                <a:lumMod val="102000"/>
+                <a:tint val="94000"/>
+              </a:schemeClr>
+            </a:gs>
+            <a:gs pos="50000">
+              <a:schemeClr val="phClr">
+                <a:satMod val="110000"/>
+                <a:lumMod val="100000"/>
+                <a:shade val="100000"/>
+              </a:schemeClr>
+            </a:gs>
+            <a:gs pos="100000">
+              <a:schemeClr val="phClr">
+                <a:lumMod val="99000"/>
+                <a:satMod val="120000"/>
+                <a:shade val="78000"/>
+              </a:schemeClr>
+            </a:gs>
+          </a:gsLst>
+          <a:lin ang="5400000" scaled="0"/>
+        </a:gradFill>
+      </a:fillStyleLst>
+      <a:lnStyleLst>
+        <a:ln w="12700" cap="flat" cmpd="sng" algn="ctr">
+          <a:solidFill>
+            <a:schemeClr val="phClr"/>
+          </a:solidFill>
+          <a:prstDash val="solid"/>
+          <a:miter lim="800000"/>
+        </a:ln>
+        <a:ln w="19050" cap="flat" cmpd="sng" algn="ctr">
+          <a:solidFill>
+            <a:schemeClr val="phClr"/>
+          </a:solidFill>
+          <a:prstDash val="solid"/>
+          <a:miter lim="800000"/>
+        </a:ln>
+        <a:ln w="25400" cap="flat" cmpd="sng" algn="ctr">
+          <a:solidFill>
+            <a:schemeClr val="phClr"/>
+          </a:solidFill>
+          <a:prstDash val="solid"/>
+          <a:miter lim="800000"/>
+        </a:ln>
+      </a:lnStyleLst>
+      <a:effectStyleLst>
+        <a:effectStyle>
+          <a:effectLst/>
+        </a:effectStyle>
+        <a:effectStyle>
+          <a:effectLst/>
+        </a:effectStyle>
+        <a:effectStyle>
+          <a:effectLst>
+            <a:outerShdw blurRad="57150" dist="19050" dir="5400000" algn="ctr" rotWithShape="0">
+              <a:srgbClr val="000000">
+                <a:alpha val="63000"/>
+              </a:srgbClr>
+            </a:outerShdw>
+          </a:effectLst>
+        </a:effectStyle>
+      </a:effectStyleLst>
+      <a:bgFillStyleLst>
+        <a:solidFill>
+          <a:schemeClr val="phClr"/>
+        </a:solidFill>
+        <a:solidFill>
+          <a:schemeClr val="phClr">
+            <a:tint val="95000"/>
+            <a:satMod val="170000"/>
+          </a:schemeClr>
+        </a:solidFill>
+        <a:gradFill rotWithShape="1">
+          <a:gsLst>
+            <a:gs pos="0">
+              <a:schemeClr val="phClr">
+                <a:tint val="93000"/>
+                <a:satMod val="150000"/>
+                <a:shade val="98000"/>
+                <a:lumMod val="102000"/>
+              </a:schemeClr>
+            </a:gs>
+            <a:gs pos="50000">
+              <a:schemeClr val="phClr">
+                <a:tint val="98000"/>
+                <a:satMod val="130000"/>
+                <a:shade val="90000"/>
+                <a:lumMod val="103000"/>
+              </a:schemeClr>
+            </a:gs>
+            <a:gs pos="100000">
+              <a:schemeClr val="phClr">
+                <a:shade val="63000"/>
+                <a:satMod val="120000"/>
+              </a:schemeClr>
+            </a:gs>
+          </a:gsLst>
+          <a:lin ang="5400000" scaled="0"/>
+        </a:gradFill>
+      </a:bgFillStyleLst>
+    </a:fmtScheme>
+  </a:themeElements>
+  <a:objectDefaults>
+    <a:lnDef>
+      <a:spPr/>
+      <a:bodyPr/>
+      <a:lstStyle/>
+      <a:style>
+        <a:lnRef idx="2">
+          <a:schemeClr val="accent1"/>
+        </a:lnRef>
+        <a:fillRef idx="0">
+          <a:schemeClr val="accent1"/>
+        </a:fillRef>
+        <a:effectRef idx="1">
+          <a:schemeClr val="accent1"/>
+        </a:effectRef>
+        <a:fontRef idx="minor">
+          <a:schemeClr val="tx1"/>
+        </a:fontRef>
+      </a:style>
+    </a:lnDef>
+  </a:objectDefaults>
+  <a:extraClrSchemeLst/>
+  <a:extLst>
+    <a:ext uri="{05A4C25C-085E-4340-85A3-A5531E510DB2}">
+      <thm15:themeFamily xmlns:thm15="http://schemas.microsoft.com/office/thememl/2012/main" name="Office Theme" id="{2E142A2C-CD16-42D6-873A-C26D2A0506FA}" vid="{1BDDFF52-6CD6-40A5-AB3C-68EB2F1E4D0A}"/>
+    </a:ext>
+  </a:extLst>
+</a:theme>
 </file>